--- a/fig/chapter3/第三章模型框架图.pptx
+++ b/fig/chapter3/第三章模型框架图.pptx
@@ -197,7 +197,7 @@
           <a:p>
             <a:fld id="{BBFEAB45-F168-40EB-9306-30C85D89BE0A}" type="datetimeFigureOut">
               <a:rPr lang="zh-CN" altLang="en-US" smtClean="0"/>
-              <a:t>2026/3/17</a:t>
+              <a:t>2026/3/19</a:t>
             </a:fld>
             <a:endParaRPr lang="zh-CN" altLang="en-US"/>
           </a:p>
@@ -679,7 +679,7 @@
           <a:p>
             <a:fld id="{026C3967-68A1-4212-8084-A25F43C8529A}" type="datetimeFigureOut">
               <a:rPr lang="zh-CN" altLang="en-US" smtClean="0"/>
-              <a:t>2026/3/17</a:t>
+              <a:t>2026/3/19</a:t>
             </a:fld>
             <a:endParaRPr lang="zh-CN" altLang="en-US"/>
           </a:p>
@@ -849,7 +849,7 @@
           <a:p>
             <a:fld id="{026C3967-68A1-4212-8084-A25F43C8529A}" type="datetimeFigureOut">
               <a:rPr lang="zh-CN" altLang="en-US" smtClean="0"/>
-              <a:t>2026/3/17</a:t>
+              <a:t>2026/3/19</a:t>
             </a:fld>
             <a:endParaRPr lang="zh-CN" altLang="en-US"/>
           </a:p>
@@ -1029,7 +1029,7 @@
           <a:p>
             <a:fld id="{026C3967-68A1-4212-8084-A25F43C8529A}" type="datetimeFigureOut">
               <a:rPr lang="zh-CN" altLang="en-US" smtClean="0"/>
-              <a:t>2026/3/17</a:t>
+              <a:t>2026/3/19</a:t>
             </a:fld>
             <a:endParaRPr lang="zh-CN" altLang="en-US"/>
           </a:p>
@@ -1199,7 +1199,7 @@
           <a:p>
             <a:fld id="{026C3967-68A1-4212-8084-A25F43C8529A}" type="datetimeFigureOut">
               <a:rPr lang="zh-CN" altLang="en-US" smtClean="0"/>
-              <a:t>2026/3/17</a:t>
+              <a:t>2026/3/19</a:t>
             </a:fld>
             <a:endParaRPr lang="zh-CN" altLang="en-US"/>
           </a:p>
@@ -1445,7 +1445,7 @@
           <a:p>
             <a:fld id="{026C3967-68A1-4212-8084-A25F43C8529A}" type="datetimeFigureOut">
               <a:rPr lang="zh-CN" altLang="en-US" smtClean="0"/>
-              <a:t>2026/3/17</a:t>
+              <a:t>2026/3/19</a:t>
             </a:fld>
             <a:endParaRPr lang="zh-CN" altLang="en-US"/>
           </a:p>
@@ -1677,7 +1677,7 @@
           <a:p>
             <a:fld id="{026C3967-68A1-4212-8084-A25F43C8529A}" type="datetimeFigureOut">
               <a:rPr lang="zh-CN" altLang="en-US" smtClean="0"/>
-              <a:t>2026/3/17</a:t>
+              <a:t>2026/3/19</a:t>
             </a:fld>
             <a:endParaRPr lang="zh-CN" altLang="en-US"/>
           </a:p>
@@ -2044,7 +2044,7 @@
           <a:p>
             <a:fld id="{026C3967-68A1-4212-8084-A25F43C8529A}" type="datetimeFigureOut">
               <a:rPr lang="zh-CN" altLang="en-US" smtClean="0"/>
-              <a:t>2026/3/17</a:t>
+              <a:t>2026/3/19</a:t>
             </a:fld>
             <a:endParaRPr lang="zh-CN" altLang="en-US"/>
           </a:p>
@@ -2162,7 +2162,7 @@
           <a:p>
             <a:fld id="{026C3967-68A1-4212-8084-A25F43C8529A}" type="datetimeFigureOut">
               <a:rPr lang="zh-CN" altLang="en-US" smtClean="0"/>
-              <a:t>2026/3/17</a:t>
+              <a:t>2026/3/19</a:t>
             </a:fld>
             <a:endParaRPr lang="zh-CN" altLang="en-US"/>
           </a:p>
@@ -2257,7 +2257,7 @@
           <a:p>
             <a:fld id="{026C3967-68A1-4212-8084-A25F43C8529A}" type="datetimeFigureOut">
               <a:rPr lang="zh-CN" altLang="en-US" smtClean="0"/>
-              <a:t>2026/3/17</a:t>
+              <a:t>2026/3/19</a:t>
             </a:fld>
             <a:endParaRPr lang="zh-CN" altLang="en-US"/>
           </a:p>
@@ -2534,7 +2534,7 @@
           <a:p>
             <a:fld id="{026C3967-68A1-4212-8084-A25F43C8529A}" type="datetimeFigureOut">
               <a:rPr lang="zh-CN" altLang="en-US" smtClean="0"/>
-              <a:t>2026/3/17</a:t>
+              <a:t>2026/3/19</a:t>
             </a:fld>
             <a:endParaRPr lang="zh-CN" altLang="en-US"/>
           </a:p>
@@ -2791,7 +2791,7 @@
           <a:p>
             <a:fld id="{026C3967-68A1-4212-8084-A25F43C8529A}" type="datetimeFigureOut">
               <a:rPr lang="zh-CN" altLang="en-US" smtClean="0"/>
-              <a:t>2026/3/17</a:t>
+              <a:t>2026/3/19</a:t>
             </a:fld>
             <a:endParaRPr lang="zh-CN" altLang="en-US"/>
           </a:p>
@@ -3004,7 +3004,7 @@
           <a:p>
             <a:fld id="{026C3967-68A1-4212-8084-A25F43C8529A}" type="datetimeFigureOut">
               <a:rPr lang="zh-CN" altLang="en-US" smtClean="0"/>
-              <a:t>2026/3/17</a:t>
+              <a:t>2026/3/19</a:t>
             </a:fld>
             <a:endParaRPr lang="zh-CN" altLang="en-US"/>
           </a:p>
@@ -3423,7 +3423,7 @@
         </p:nvSpPr>
         <p:spPr>
           <a:xfrm>
-            <a:off x="88088" y="62974"/>
+            <a:off x="104082" y="39442"/>
             <a:ext cx="11388592" cy="6935851"/>
           </a:xfrm>
           <a:prstGeom prst="rect">
@@ -3549,7 +3549,7 @@
               <p:spPr>
                 <a:xfrm>
                   <a:off x="1848537" y="292187"/>
-                  <a:ext cx="1569660" cy="281295"/>
+                  <a:ext cx="1569660" cy="326788"/>
                 </a:xfrm>
                 <a:prstGeom prst="rect">
                   <a:avLst/>
@@ -3563,14 +3563,14 @@
                 <a:lstStyle/>
                 <a:p>
                   <a:r>
-                    <a:rPr lang="zh-CN" altLang="en-US" sz="1268" dirty="0">
+                    <a:rPr lang="zh-CN" altLang="en-US" sz="1600" dirty="0">
                       <a:latin typeface="宋体" panose="02010600030101010101" pitchFamily="2" charset="-122"/>
                       <a:ea typeface="宋体" panose="02010600030101010101" pitchFamily="2" charset="-122"/>
                     </a:rPr>
                     <a:t>输入流量批次</a:t>
                   </a:r>
                   <a:r>
-                    <a:rPr lang="en-US" altLang="zh-CN" sz="1268" dirty="0">
+                    <a:rPr lang="en-US" altLang="zh-CN" sz="1600" dirty="0">
                       <a:latin typeface="宋体" panose="02010600030101010101" pitchFamily="2" charset="-122"/>
                       <a:ea typeface="宋体" panose="02010600030101010101" pitchFamily="2" charset="-122"/>
                     </a:rPr>
@@ -3579,7 +3579,7 @@
                   <a14:m>
                     <m:oMath xmlns:m="http://schemas.openxmlformats.org/officeDocument/2006/math">
                       <m:r>
-                        <a:rPr lang="zh-CN" altLang="en-US" sz="1268" i="1">
+                        <a:rPr lang="zh-CN" altLang="en-US" sz="1600" i="1">
                           <a:latin typeface="Cambria Math" panose="02040503050406030204" pitchFamily="18" charset="0"/>
                           <a:ea typeface="宋体" panose="02010600030101010101" pitchFamily="2" charset="-122"/>
                         </a:rPr>
@@ -3588,13 +3588,13 @@
                     </m:oMath>
                   </a14:m>
                   <a:r>
-                    <a:rPr lang="en-US" altLang="zh-CN" sz="1268" dirty="0">
+                    <a:rPr lang="en-US" altLang="zh-CN" sz="1600" dirty="0">
                       <a:latin typeface="宋体" panose="02010600030101010101" pitchFamily="2" charset="-122"/>
                       <a:ea typeface="宋体" panose="02010600030101010101" pitchFamily="2" charset="-122"/>
                     </a:rPr>
                     <a:t>)</a:t>
                   </a:r>
-                  <a:endParaRPr lang="zh-CN" altLang="en-US" sz="1268" dirty="0">
+                  <a:endParaRPr lang="zh-CN" altLang="en-US" sz="1600" dirty="0">
                     <a:latin typeface="宋体" panose="02010600030101010101" pitchFamily="2" charset="-122"/>
                     <a:ea typeface="宋体" panose="02010600030101010101" pitchFamily="2" charset="-122"/>
                   </a:endParaRPr>
@@ -3620,15 +3620,15 @@
               <p:spPr>
                 <a:xfrm>
                   <a:off x="1848537" y="292187"/>
-                  <a:ext cx="1569660" cy="281295"/>
+                  <a:ext cx="1569660" cy="326788"/>
                 </a:xfrm>
                 <a:prstGeom prst="rect">
                   <a:avLst/>
                 </a:prstGeom>
                 <a:blipFill>
-                  <a:blip r:embed="rId67"/>
+                  <a:blip r:embed="rId3"/>
                   <a:stretch>
-                    <a:fillRect l="-375" t="-2083" b="-14583"/>
+                    <a:fillRect l="-2247" t="-7143" r="-8240" b="-19643"/>
                   </a:stretch>
                 </a:blipFill>
               </p:spPr>
@@ -4326,14 +4326,16 @@
             <a:ext cx="2792673" cy="4919880"/>
           </a:xfrm>
           <a:prstGeom prst="roundRect">
-            <a:avLst/>
+            <a:avLst>
+              <a:gd name="adj" fmla="val 0"/>
+            </a:avLst>
           </a:prstGeom>
           <a:solidFill>
-            <a:schemeClr val="accent3">
-              <a:lumMod val="20000"/>
-              <a:lumOff val="80000"/>
-            </a:schemeClr>
+            <a:srgbClr val="F2F2F2"/>
           </a:solidFill>
+          <a:ln>
+            <a:noFill/>
+          </a:ln>
         </p:spPr>
         <p:style>
           <a:lnRef idx="2">
@@ -4362,53 +4364,6 @@
       </p:sp>
       <p:sp>
         <p:nvSpPr>
-          <p:cNvPr id="102" name="流程图: 可选过程 101">
-            <a:extLst>
-              <a:ext uri="{FF2B5EF4-FFF2-40B4-BE49-F238E27FC236}">
-                <a16:creationId xmlns:a16="http://schemas.microsoft.com/office/drawing/2014/main" id="{B29C87A2-A2DB-4189-93AC-32B1A3F1EAA9}"/>
-              </a:ext>
-            </a:extLst>
-          </p:cNvPr>
-          <p:cNvSpPr/>
-          <p:nvPr/>
-        </p:nvSpPr>
-        <p:spPr>
-          <a:xfrm>
-            <a:off x="644641" y="1867916"/>
-            <a:ext cx="2321241" cy="2166507"/>
-          </a:xfrm>
-          <a:prstGeom prst="flowChartAlternateProcess">
-            <a:avLst/>
-          </a:prstGeom>
-          <a:noFill/>
-        </p:spPr>
-        <p:style>
-          <a:lnRef idx="2">
-            <a:schemeClr val="accent1">
-              <a:shade val="50000"/>
-            </a:schemeClr>
-          </a:lnRef>
-          <a:fillRef idx="1">
-            <a:schemeClr val="accent1"/>
-          </a:fillRef>
-          <a:effectRef idx="0">
-            <a:schemeClr val="accent1"/>
-          </a:effectRef>
-          <a:fontRef idx="minor">
-            <a:schemeClr val="lt1"/>
-          </a:fontRef>
-        </p:style>
-        <p:txBody>
-          <a:bodyPr rtlCol="0" anchor="ctr"/>
-          <a:lstStyle/>
-          <a:p>
-            <a:pPr algn="ctr"/>
-            <a:endParaRPr lang="zh-CN" altLang="en-US" sz="1902"/>
-          </a:p>
-        </p:txBody>
-      </p:sp>
-      <p:sp>
-        <p:nvSpPr>
           <p:cNvPr id="103" name="文本框 102">
             <a:extLst>
               <a:ext uri="{FF2B5EF4-FFF2-40B4-BE49-F238E27FC236}">
@@ -4421,8 +4376,8 @@
         </p:nvSpPr>
         <p:spPr>
           <a:xfrm>
-            <a:off x="1432660" y="4058207"/>
-            <a:ext cx="1630082" cy="262675"/>
+            <a:off x="1411667" y="3862655"/>
+            <a:ext cx="1059868" cy="338554"/>
           </a:xfrm>
           <a:prstGeom prst="rect">
             <a:avLst/>
@@ -4436,7 +4391,7 @@
           <a:lstStyle/>
           <a:p>
             <a:r>
-              <a:rPr lang="zh-CN" altLang="en-US" sz="1268" dirty="0">
+              <a:rPr lang="zh-CN" altLang="en-US" sz="1600" dirty="0">
                 <a:latin typeface="宋体" panose="02010600030101010101" pitchFamily="2" charset="-122"/>
                 <a:ea typeface="宋体" panose="02010600030101010101" pitchFamily="2" charset="-122"/>
               </a:rPr>
@@ -4459,7 +4414,7 @@
         </p:nvSpPr>
         <p:spPr>
           <a:xfrm>
-            <a:off x="1579634" y="1877140"/>
+            <a:off x="1510065" y="1585277"/>
             <a:ext cx="536348" cy="287451"/>
           </a:xfrm>
           <a:prstGeom prst="rect">
@@ -4474,13 +4429,13 @@
           <a:lstStyle/>
           <a:p>
             <a:r>
-              <a:rPr lang="en-US" altLang="zh-CN" sz="1268" b="1" dirty="0">
+              <a:rPr lang="en-US" altLang="zh-CN" sz="1268" dirty="0">
                 <a:latin typeface="宋体" panose="02010600030101010101" pitchFamily="2" charset="-122"/>
                 <a:ea typeface="宋体" panose="02010600030101010101" pitchFamily="2" charset="-122"/>
               </a:rPr>
               <a:t>WPAT</a:t>
             </a:r>
-            <a:endParaRPr lang="zh-CN" altLang="en-US" sz="1268" b="1" dirty="0">
+            <a:endParaRPr lang="zh-CN" altLang="en-US" sz="1268" dirty="0">
               <a:latin typeface="宋体" panose="02010600030101010101" pitchFamily="2" charset="-122"/>
               <a:ea typeface="宋体" panose="02010600030101010101" pitchFamily="2" charset="-122"/>
             </a:endParaRPr>
@@ -4501,8 +4456,8 @@
         </p:nvSpPr>
         <p:spPr>
           <a:xfrm rot="5400000">
-            <a:off x="1627429" y="4357577"/>
-            <a:ext cx="429239" cy="312247"/>
+            <a:off x="1552941" y="4283090"/>
+            <a:ext cx="578214" cy="312247"/>
           </a:xfrm>
           <a:prstGeom prst="rightArrow">
             <a:avLst/>
@@ -4623,8 +4578,8 @@
             </a:p>
           </p:txBody>
         </p:sp>
-        <mc:AlternateContent xmlns:mc="http://schemas.openxmlformats.org/markup-compatibility/2006">
-          <mc:Choice xmlns:a14="http://schemas.microsoft.com/office/drawing/2010/main" Requires="a14">
+        <mc:AlternateContent xmlns:mc="http://schemas.openxmlformats.org/markup-compatibility/2006" xmlns:a14="http://schemas.microsoft.com/office/drawing/2010/main">
+          <mc:Choice Requires="a14">
             <p:sp>
               <p:nvSpPr>
                 <p:cNvPr id="114" name="流程图: 接点 113">
@@ -4743,7 +4698,7 @@
               </p:txBody>
             </p:sp>
           </mc:Choice>
-          <mc:Fallback>
+          <mc:Fallback xmlns="">
             <p:sp>
               <p:nvSpPr>
                 <p:cNvPr id="114" name="流程图: 接点 113">
@@ -4795,8 +4750,8 @@
             </p:sp>
           </mc:Fallback>
         </mc:AlternateContent>
-        <mc:AlternateContent xmlns:mc="http://schemas.openxmlformats.org/markup-compatibility/2006">
-          <mc:Choice xmlns:a14="http://schemas.microsoft.com/office/drawing/2010/main" Requires="a14">
+        <mc:AlternateContent xmlns:mc="http://schemas.openxmlformats.org/markup-compatibility/2006" xmlns:a14="http://schemas.microsoft.com/office/drawing/2010/main">
+          <mc:Choice Requires="a14">
             <p:sp>
               <p:nvSpPr>
                 <p:cNvPr id="115" name="流程图: 接点 114">
@@ -4915,7 +4870,7 @@
               </p:txBody>
             </p:sp>
           </mc:Choice>
-          <mc:Fallback>
+          <mc:Fallback xmlns="">
             <p:sp>
               <p:nvSpPr>
                 <p:cNvPr id="115" name="流程图: 接点 114">
@@ -4967,8 +4922,8 @@
             </p:sp>
           </mc:Fallback>
         </mc:AlternateContent>
-        <mc:AlternateContent xmlns:mc="http://schemas.openxmlformats.org/markup-compatibility/2006">
-          <mc:Choice xmlns:a14="http://schemas.microsoft.com/office/drawing/2010/main" Requires="a14">
+        <mc:AlternateContent xmlns:mc="http://schemas.openxmlformats.org/markup-compatibility/2006" xmlns:a14="http://schemas.microsoft.com/office/drawing/2010/main">
+          <mc:Choice Requires="a14">
             <p:sp>
               <p:nvSpPr>
                 <p:cNvPr id="116" name="流程图: 接点 115">
@@ -5087,7 +5042,7 @@
               </p:txBody>
             </p:sp>
           </mc:Choice>
-          <mc:Fallback>
+          <mc:Fallback xmlns="">
             <p:sp>
               <p:nvSpPr>
                 <p:cNvPr id="116" name="流程图: 接点 115">
@@ -5175,8 +5130,8 @@
             </a:p>
           </p:txBody>
         </p:sp>
-        <mc:AlternateContent xmlns:mc="http://schemas.openxmlformats.org/markup-compatibility/2006">
-          <mc:Choice xmlns:a14="http://schemas.microsoft.com/office/drawing/2010/main" Requires="a14">
+        <mc:AlternateContent xmlns:mc="http://schemas.openxmlformats.org/markup-compatibility/2006" xmlns:a14="http://schemas.microsoft.com/office/drawing/2010/main">
+          <mc:Choice Requires="a14">
             <p:sp>
               <p:nvSpPr>
                 <p:cNvPr id="118" name="流程图: 接点 117">
@@ -5298,7 +5253,7 @@
               </p:txBody>
             </p:sp>
           </mc:Choice>
-          <mc:Fallback>
+          <mc:Fallback xmlns="">
             <p:sp>
               <p:nvSpPr>
                 <p:cNvPr id="118" name="流程图: 接点 117">
@@ -5433,8 +5388,8 @@
             </a:p>
           </p:txBody>
         </p:sp>
-        <mc:AlternateContent xmlns:mc="http://schemas.openxmlformats.org/markup-compatibility/2006">
-          <mc:Choice xmlns:a14="http://schemas.microsoft.com/office/drawing/2010/main" Requires="a14">
+        <mc:AlternateContent xmlns:mc="http://schemas.openxmlformats.org/markup-compatibility/2006" xmlns:a14="http://schemas.microsoft.com/office/drawing/2010/main">
+          <mc:Choice Requires="a14">
             <p:sp>
               <p:nvSpPr>
                 <p:cNvPr id="120" name="流程图: 接点 119">
@@ -5553,7 +5508,7 @@
               </p:txBody>
             </p:sp>
           </mc:Choice>
-          <mc:Fallback>
+          <mc:Fallback xmlns="">
             <p:sp>
               <p:nvSpPr>
                 <p:cNvPr id="120" name="流程图: 接点 119">
@@ -5605,8 +5560,8 @@
             </p:sp>
           </mc:Fallback>
         </mc:AlternateContent>
-        <mc:AlternateContent xmlns:mc="http://schemas.openxmlformats.org/markup-compatibility/2006">
-          <mc:Choice xmlns:a14="http://schemas.microsoft.com/office/drawing/2010/main" Requires="a14">
+        <mc:AlternateContent xmlns:mc="http://schemas.openxmlformats.org/markup-compatibility/2006" xmlns:a14="http://schemas.microsoft.com/office/drawing/2010/main">
+          <mc:Choice Requires="a14">
             <p:sp>
               <p:nvSpPr>
                 <p:cNvPr id="121" name="流程图: 接点 120">
@@ -5725,7 +5680,7 @@
               </p:txBody>
             </p:sp>
           </mc:Choice>
-          <mc:Fallback>
+          <mc:Fallback xmlns="">
             <p:sp>
               <p:nvSpPr>
                 <p:cNvPr id="121" name="流程图: 接点 120">
@@ -5777,8 +5732,8 @@
             </p:sp>
           </mc:Fallback>
         </mc:AlternateContent>
-        <mc:AlternateContent xmlns:mc="http://schemas.openxmlformats.org/markup-compatibility/2006">
-          <mc:Choice xmlns:a14="http://schemas.microsoft.com/office/drawing/2010/main" Requires="a14">
+        <mc:AlternateContent xmlns:mc="http://schemas.openxmlformats.org/markup-compatibility/2006" xmlns:a14="http://schemas.microsoft.com/office/drawing/2010/main">
+          <mc:Choice Requires="a14">
             <p:sp>
               <p:nvSpPr>
                 <p:cNvPr id="122" name="流程图: 接点 121">
@@ -5897,7 +5852,7 @@
               </p:txBody>
             </p:sp>
           </mc:Choice>
-          <mc:Fallback>
+          <mc:Fallback xmlns="">
             <p:sp>
               <p:nvSpPr>
                 <p:cNvPr id="122" name="流程图: 接点 121">
@@ -5985,8 +5940,8 @@
             </a:p>
           </p:txBody>
         </p:sp>
-        <mc:AlternateContent xmlns:mc="http://schemas.openxmlformats.org/markup-compatibility/2006">
-          <mc:Choice xmlns:a14="http://schemas.microsoft.com/office/drawing/2010/main" Requires="a14">
+        <mc:AlternateContent xmlns:mc="http://schemas.openxmlformats.org/markup-compatibility/2006" xmlns:a14="http://schemas.microsoft.com/office/drawing/2010/main">
+          <mc:Choice Requires="a14">
             <p:sp>
               <p:nvSpPr>
                 <p:cNvPr id="124" name="流程图: 接点 123">
@@ -6108,7 +6063,7 @@
               </p:txBody>
             </p:sp>
           </mc:Choice>
-          <mc:Fallback>
+          <mc:Fallback xmlns="">
             <p:sp>
               <p:nvSpPr>
                 <p:cNvPr id="124" name="流程图: 接点 123">
@@ -6243,8 +6198,8 @@
             </a:p>
           </p:txBody>
         </p:sp>
-        <mc:AlternateContent xmlns:mc="http://schemas.openxmlformats.org/markup-compatibility/2006">
-          <mc:Choice xmlns:a14="http://schemas.microsoft.com/office/drawing/2010/main" Requires="a14">
+        <mc:AlternateContent xmlns:mc="http://schemas.openxmlformats.org/markup-compatibility/2006" xmlns:a14="http://schemas.microsoft.com/office/drawing/2010/main">
+          <mc:Choice Requires="a14">
             <p:sp>
               <p:nvSpPr>
                 <p:cNvPr id="126" name="流程图: 接点 125">
@@ -6363,7 +6318,7 @@
               </p:txBody>
             </p:sp>
           </mc:Choice>
-          <mc:Fallback>
+          <mc:Fallback xmlns="">
             <p:sp>
               <p:nvSpPr>
                 <p:cNvPr id="126" name="流程图: 接点 125">
@@ -6415,8 +6370,8 @@
             </p:sp>
           </mc:Fallback>
         </mc:AlternateContent>
-        <mc:AlternateContent xmlns:mc="http://schemas.openxmlformats.org/markup-compatibility/2006">
-          <mc:Choice xmlns:a14="http://schemas.microsoft.com/office/drawing/2010/main" Requires="a14">
+        <mc:AlternateContent xmlns:mc="http://schemas.openxmlformats.org/markup-compatibility/2006" xmlns:a14="http://schemas.microsoft.com/office/drawing/2010/main">
+          <mc:Choice Requires="a14">
             <p:sp>
               <p:nvSpPr>
                 <p:cNvPr id="127" name="流程图: 接点 126">
@@ -6535,7 +6490,7 @@
               </p:txBody>
             </p:sp>
           </mc:Choice>
-          <mc:Fallback>
+          <mc:Fallback xmlns="">
             <p:sp>
               <p:nvSpPr>
                 <p:cNvPr id="127" name="流程图: 接点 126">
@@ -6587,8 +6542,8 @@
             </p:sp>
           </mc:Fallback>
         </mc:AlternateContent>
-        <mc:AlternateContent xmlns:mc="http://schemas.openxmlformats.org/markup-compatibility/2006">
-          <mc:Choice xmlns:a14="http://schemas.microsoft.com/office/drawing/2010/main" Requires="a14">
+        <mc:AlternateContent xmlns:mc="http://schemas.openxmlformats.org/markup-compatibility/2006" xmlns:a14="http://schemas.microsoft.com/office/drawing/2010/main">
+          <mc:Choice Requires="a14">
             <p:sp>
               <p:nvSpPr>
                 <p:cNvPr id="128" name="流程图: 接点 127">
@@ -6707,7 +6662,7 @@
               </p:txBody>
             </p:sp>
           </mc:Choice>
-          <mc:Fallback>
+          <mc:Fallback xmlns="">
             <p:sp>
               <p:nvSpPr>
                 <p:cNvPr id="128" name="流程图: 接点 127">
@@ -6795,8 +6750,8 @@
             </a:p>
           </p:txBody>
         </p:sp>
-        <mc:AlternateContent xmlns:mc="http://schemas.openxmlformats.org/markup-compatibility/2006">
-          <mc:Choice xmlns:a14="http://schemas.microsoft.com/office/drawing/2010/main" Requires="a14">
+        <mc:AlternateContent xmlns:mc="http://schemas.openxmlformats.org/markup-compatibility/2006" xmlns:a14="http://schemas.microsoft.com/office/drawing/2010/main">
+          <mc:Choice Requires="a14">
             <p:sp>
               <p:nvSpPr>
                 <p:cNvPr id="130" name="流程图: 接点 129">
@@ -6918,7 +6873,7 @@
               </p:txBody>
             </p:sp>
           </mc:Choice>
-          <mc:Fallback>
+          <mc:Fallback xmlns="">
             <p:sp>
               <p:nvSpPr>
                 <p:cNvPr id="130" name="流程图: 接点 129">
@@ -7053,8 +7008,8 @@
             </a:p>
           </p:txBody>
         </p:sp>
-        <mc:AlternateContent xmlns:mc="http://schemas.openxmlformats.org/markup-compatibility/2006">
-          <mc:Choice xmlns:a14="http://schemas.microsoft.com/office/drawing/2010/main" Requires="a14">
+        <mc:AlternateContent xmlns:mc="http://schemas.openxmlformats.org/markup-compatibility/2006" xmlns:a14="http://schemas.microsoft.com/office/drawing/2010/main">
+          <mc:Choice Requires="a14">
             <p:sp>
               <p:nvSpPr>
                 <p:cNvPr id="132" name="流程图: 接点 131">
@@ -7173,7 +7128,7 @@
               </p:txBody>
             </p:sp>
           </mc:Choice>
-          <mc:Fallback>
+          <mc:Fallback xmlns="">
             <p:sp>
               <p:nvSpPr>
                 <p:cNvPr id="132" name="流程图: 接点 131">
@@ -7225,8 +7180,8 @@
             </p:sp>
           </mc:Fallback>
         </mc:AlternateContent>
-        <mc:AlternateContent xmlns:mc="http://schemas.openxmlformats.org/markup-compatibility/2006">
-          <mc:Choice xmlns:a14="http://schemas.microsoft.com/office/drawing/2010/main" Requires="a14">
+        <mc:AlternateContent xmlns:mc="http://schemas.openxmlformats.org/markup-compatibility/2006" xmlns:a14="http://schemas.microsoft.com/office/drawing/2010/main">
+          <mc:Choice Requires="a14">
             <p:sp>
               <p:nvSpPr>
                 <p:cNvPr id="133" name="流程图: 接点 132">
@@ -7345,7 +7300,7 @@
               </p:txBody>
             </p:sp>
           </mc:Choice>
-          <mc:Fallback>
+          <mc:Fallback xmlns="">
             <p:sp>
               <p:nvSpPr>
                 <p:cNvPr id="133" name="流程图: 接点 132">
@@ -7397,8 +7352,8 @@
             </p:sp>
           </mc:Fallback>
         </mc:AlternateContent>
-        <mc:AlternateContent xmlns:mc="http://schemas.openxmlformats.org/markup-compatibility/2006">
-          <mc:Choice xmlns:a14="http://schemas.microsoft.com/office/drawing/2010/main" Requires="a14">
+        <mc:AlternateContent xmlns:mc="http://schemas.openxmlformats.org/markup-compatibility/2006" xmlns:a14="http://schemas.microsoft.com/office/drawing/2010/main">
+          <mc:Choice Requires="a14">
             <p:sp>
               <p:nvSpPr>
                 <p:cNvPr id="134" name="流程图: 接点 133">
@@ -7517,7 +7472,7 @@
               </p:txBody>
             </p:sp>
           </mc:Choice>
-          <mc:Fallback>
+          <mc:Fallback xmlns="">
             <p:sp>
               <p:nvSpPr>
                 <p:cNvPr id="134" name="流程图: 接点 133">
@@ -7605,8 +7560,8 @@
             </a:p>
           </p:txBody>
         </p:sp>
-        <mc:AlternateContent xmlns:mc="http://schemas.openxmlformats.org/markup-compatibility/2006">
-          <mc:Choice xmlns:a14="http://schemas.microsoft.com/office/drawing/2010/main" Requires="a14">
+        <mc:AlternateContent xmlns:mc="http://schemas.openxmlformats.org/markup-compatibility/2006" xmlns:a14="http://schemas.microsoft.com/office/drawing/2010/main">
+          <mc:Choice Requires="a14">
             <p:sp>
               <p:nvSpPr>
                 <p:cNvPr id="136" name="流程图: 接点 135">
@@ -7728,7 +7683,7 @@
               </p:txBody>
             </p:sp>
           </mc:Choice>
-          <mc:Fallback>
+          <mc:Fallback xmlns="">
             <p:sp>
               <p:nvSpPr>
                 <p:cNvPr id="136" name="流程图: 接点 135">
@@ -7781,82 +7736,107 @@
           </mc:Fallback>
         </mc:AlternateContent>
       </p:grpSp>
-      <p:sp>
-        <p:nvSpPr>
-          <p:cNvPr id="139" name="文本框 138">
-            <a:extLst>
-              <a:ext uri="{FF2B5EF4-FFF2-40B4-BE49-F238E27FC236}">
-                <a16:creationId xmlns:a16="http://schemas.microsoft.com/office/drawing/2014/main" id="{E6D15D7F-305A-4FE7-A8A5-EA16E46AC4B6}"/>
-              </a:ext>
-            </a:extLst>
-          </p:cNvPr>
-          <p:cNvSpPr txBox="1"/>
-          <p:nvPr/>
-        </p:nvSpPr>
-        <p:spPr>
-          <a:xfrm>
-            <a:off x="1242109" y="5868333"/>
-            <a:ext cx="1630083" cy="291424"/>
-          </a:xfrm>
-          <a:prstGeom prst="rect">
-            <a:avLst/>
-          </a:prstGeom>
-          <a:noFill/>
-        </p:spPr>
-        <p:txBody>
-          <a:bodyPr wrap="square" rtlCol="0">
-            <a:spAutoFit/>
-          </a:bodyPr>
-          <a:lstStyle/>
-          <a:p>
-            <a:r>
-              <a:rPr lang="zh-CN" altLang="en-US" sz="1268" dirty="0">
-                <a:latin typeface="宋体" panose="02010600030101010101" pitchFamily="2" charset="-122"/>
-                <a:ea typeface="宋体" panose="02010600030101010101" pitchFamily="2" charset="-122"/>
-              </a:rPr>
-              <a:t>隐藏层嵌入</a:t>
-            </a:r>
-          </a:p>
-        </p:txBody>
-      </p:sp>
-      <p:sp>
-        <p:nvSpPr>
-          <p:cNvPr id="140" name="文本框 139">
-            <a:extLst>
-              <a:ext uri="{FF2B5EF4-FFF2-40B4-BE49-F238E27FC236}">
-                <a16:creationId xmlns:a16="http://schemas.microsoft.com/office/drawing/2014/main" id="{908BC6D5-6FB5-44F9-85A6-598ABD0FF0DB}"/>
-              </a:ext>
-            </a:extLst>
-          </p:cNvPr>
-          <p:cNvSpPr txBox="1"/>
-          <p:nvPr/>
-        </p:nvSpPr>
-        <p:spPr>
-          <a:xfrm>
-            <a:off x="1235319" y="1546908"/>
-            <a:ext cx="1630082" cy="291424"/>
-          </a:xfrm>
-          <a:prstGeom prst="rect">
-            <a:avLst/>
-          </a:prstGeom>
-          <a:noFill/>
-        </p:spPr>
-        <p:txBody>
-          <a:bodyPr wrap="square" rtlCol="0">
-            <a:spAutoFit/>
-          </a:bodyPr>
-          <a:lstStyle/>
-          <a:p>
-            <a:r>
-              <a:rPr lang="zh-CN" altLang="en-US" sz="1268" dirty="0">
-                <a:latin typeface="宋体" panose="02010600030101010101" pitchFamily="2" charset="-122"/>
-                <a:ea typeface="宋体" panose="02010600030101010101" pitchFamily="2" charset="-122"/>
-              </a:rPr>
-              <a:t>特征学习模块</a:t>
-            </a:r>
-          </a:p>
-        </p:txBody>
-      </p:sp>
+      <mc:AlternateContent xmlns:mc="http://schemas.openxmlformats.org/markup-compatibility/2006" xmlns:a14="http://schemas.microsoft.com/office/drawing/2010/main">
+        <mc:Choice Requires="a14">
+          <p:sp>
+            <p:nvSpPr>
+              <p:cNvPr id="139" name="文本框 138">
+                <a:extLst>
+                  <a:ext uri="{FF2B5EF4-FFF2-40B4-BE49-F238E27FC236}">
+                    <a16:creationId xmlns:a16="http://schemas.microsoft.com/office/drawing/2014/main" id="{E6D15D7F-305A-4FE7-A8A5-EA16E46AC4B6}"/>
+                  </a:ext>
+                </a:extLst>
+              </p:cNvPr>
+              <p:cNvSpPr txBox="1"/>
+              <p:nvPr/>
+            </p:nvSpPr>
+            <p:spPr>
+              <a:xfrm>
+                <a:off x="1166815" y="5861929"/>
+                <a:ext cx="1630083" cy="338554"/>
+              </a:xfrm>
+              <a:prstGeom prst="rect">
+                <a:avLst/>
+              </a:prstGeom>
+              <a:noFill/>
+            </p:spPr>
+            <p:txBody>
+              <a:bodyPr wrap="square" rtlCol="0">
+                <a:spAutoFit/>
+              </a:bodyPr>
+              <a:lstStyle/>
+              <a:p>
+                <a:r>
+                  <a:rPr lang="zh-CN" altLang="en-US" sz="1600" dirty="0">
+                    <a:latin typeface="宋体" panose="02010600030101010101" pitchFamily="2" charset="-122"/>
+                    <a:ea typeface="宋体" panose="02010600030101010101" pitchFamily="2" charset="-122"/>
+                  </a:rPr>
+                  <a:t>隐藏层嵌入</a:t>
+                </a:r>
+                <a14:m>
+                  <m:oMath xmlns:m="http://schemas.openxmlformats.org/officeDocument/2006/math">
+                    <m:r>
+                      <a:rPr lang="zh-CN" altLang="en-US" sz="1600">
+                        <a:latin typeface="Cambria Math" panose="02040503050406030204" pitchFamily="18" charset="0"/>
+                        <a:ea typeface="宋体" panose="02010600030101010101" pitchFamily="2" charset="-122"/>
+                      </a:rPr>
+                      <m:t>𝔃</m:t>
+                    </m:r>
+                  </m:oMath>
+                </a14:m>
+                <a:endParaRPr lang="zh-CN" altLang="en-US" sz="1600" dirty="0">
+                  <a:latin typeface="宋体" panose="02010600030101010101" pitchFamily="2" charset="-122"/>
+                  <a:ea typeface="宋体" panose="02010600030101010101" pitchFamily="2" charset="-122"/>
+                </a:endParaRPr>
+              </a:p>
+            </p:txBody>
+          </p:sp>
+        </mc:Choice>
+        <mc:Fallback xmlns="">
+          <p:sp>
+            <p:nvSpPr>
+              <p:cNvPr id="139" name="文本框 138">
+                <a:extLst>
+                  <a:ext uri="{FF2B5EF4-FFF2-40B4-BE49-F238E27FC236}">
+                    <a16:creationId xmlns:a16="http://schemas.microsoft.com/office/drawing/2014/main" id="{E6D15D7F-305A-4FE7-A8A5-EA16E46AC4B6}"/>
+                  </a:ext>
+                </a:extLst>
+              </p:cNvPr>
+              <p:cNvSpPr txBox="1">
+                <a:spLocks noRot="1" noChangeAspect="1" noMove="1" noResize="1" noEditPoints="1" noAdjustHandles="1" noChangeArrowheads="1" noChangeShapeType="1" noTextEdit="1"/>
+              </p:cNvSpPr>
+              <p:nvPr/>
+            </p:nvSpPr>
+            <p:spPr>
+              <a:xfrm>
+                <a:off x="1166815" y="5861929"/>
+                <a:ext cx="1630083" cy="338554"/>
+              </a:xfrm>
+              <a:prstGeom prst="rect">
+                <a:avLst/>
+              </a:prstGeom>
+              <a:blipFill>
+                <a:blip r:embed="rId88"/>
+                <a:stretch>
+                  <a:fillRect l="-1866" t="-7273" b="-21818"/>
+                </a:stretch>
+              </a:blipFill>
+            </p:spPr>
+            <p:txBody>
+              <a:bodyPr/>
+              <a:lstStyle/>
+              <a:p>
+                <a:r>
+                  <a:rPr lang="zh-CN" altLang="en-US">
+                    <a:noFill/>
+                  </a:rPr>
+                  <a:t> </a:t>
+                </a:r>
+              </a:p>
+            </p:txBody>
+          </p:sp>
+        </mc:Fallback>
+      </mc:AlternateContent>
       <p:sp>
         <p:nvSpPr>
           <p:cNvPr id="142" name="矩形: 圆角 141">
@@ -7875,15 +7855,15 @@
             <a:ext cx="4825946" cy="1852841"/>
           </a:xfrm>
           <a:prstGeom prst="roundRect">
-            <a:avLst/>
+            <a:avLst>
+              <a:gd name="adj" fmla="val 0"/>
+            </a:avLst>
           </a:prstGeom>
           <a:solidFill>
-            <a:srgbClr val="D3C0DE"/>
+            <a:srgbClr val="F6BBDB"/>
           </a:solidFill>
           <a:ln>
-            <a:solidFill>
-              <a:srgbClr val="7C4F97"/>
-            </a:solidFill>
+            <a:noFill/>
           </a:ln>
         </p:spPr>
         <p:style>
@@ -8233,8 +8213,8 @@
           </a:p>
         </p:txBody>
       </p:sp>
-      <mc:AlternateContent xmlns:mc="http://schemas.openxmlformats.org/markup-compatibility/2006">
-        <mc:Choice xmlns:a14="http://schemas.microsoft.com/office/drawing/2010/main" Requires="a14">
+      <mc:AlternateContent xmlns:mc="http://schemas.openxmlformats.org/markup-compatibility/2006" xmlns:a14="http://schemas.microsoft.com/office/drawing/2010/main">
+        <mc:Choice Requires="a14">
           <p:sp>
             <p:nvSpPr>
               <p:cNvPr id="150" name="文本框 149">
@@ -8309,7 +8289,7 @@
             </p:txBody>
           </p:sp>
         </mc:Choice>
-        <mc:Fallback>
+        <mc:Fallback xmlns="">
           <p:sp>
             <p:nvSpPr>
               <p:cNvPr id="150" name="文本框 149">
@@ -8333,7 +8313,7 @@
                 <a:avLst/>
               </a:prstGeom>
               <a:blipFill>
-                <a:blip r:embed="rId88"/>
+                <a:blip r:embed="rId89"/>
                 <a:stretch>
                   <a:fillRect/>
                 </a:stretch>
@@ -8354,8 +8334,8 @@
           </p:sp>
         </mc:Fallback>
       </mc:AlternateContent>
-      <mc:AlternateContent xmlns:mc="http://schemas.openxmlformats.org/markup-compatibility/2006">
-        <mc:Choice xmlns:a14="http://schemas.microsoft.com/office/drawing/2010/main" Requires="a14">
+      <mc:AlternateContent xmlns:mc="http://schemas.openxmlformats.org/markup-compatibility/2006" xmlns:a14="http://schemas.microsoft.com/office/drawing/2010/main">
+        <mc:Choice Requires="a14">
           <p:sp>
             <p:nvSpPr>
               <p:cNvPr id="151" name="文本框 150">
@@ -8430,7 +8410,7 @@
             </p:txBody>
           </p:sp>
         </mc:Choice>
-        <mc:Fallback>
+        <mc:Fallback xmlns="">
           <p:sp>
             <p:nvSpPr>
               <p:cNvPr id="151" name="文本框 150">
@@ -8454,7 +8434,7 @@
                 <a:avLst/>
               </a:prstGeom>
               <a:blipFill>
-                <a:blip r:embed="rId89"/>
+                <a:blip r:embed="rId90"/>
                 <a:stretch>
                   <a:fillRect b="-4082"/>
                 </a:stretch>
@@ -8475,8 +8455,8 @@
           </p:sp>
         </mc:Fallback>
       </mc:AlternateContent>
-      <mc:AlternateContent xmlns:mc="http://schemas.openxmlformats.org/markup-compatibility/2006">
-        <mc:Choice xmlns:a14="http://schemas.microsoft.com/office/drawing/2010/main" Requires="a14">
+      <mc:AlternateContent xmlns:mc="http://schemas.openxmlformats.org/markup-compatibility/2006" xmlns:a14="http://schemas.microsoft.com/office/drawing/2010/main">
+        <mc:Choice Requires="a14">
           <p:sp>
             <p:nvSpPr>
               <p:cNvPr id="152" name="文本框 151">
@@ -8551,7 +8531,7 @@
             </p:txBody>
           </p:sp>
         </mc:Choice>
-        <mc:Fallback>
+        <mc:Fallback xmlns="">
           <p:sp>
             <p:nvSpPr>
               <p:cNvPr id="152" name="文本框 151">
@@ -8575,7 +8555,7 @@
                 <a:avLst/>
               </a:prstGeom>
               <a:blipFill>
-                <a:blip r:embed="rId90"/>
+                <a:blip r:embed="rId91"/>
                 <a:stretch>
                   <a:fillRect b="-6122"/>
                 </a:stretch>
@@ -8596,8 +8576,8 @@
           </p:sp>
         </mc:Fallback>
       </mc:AlternateContent>
-      <mc:AlternateContent xmlns:mc="http://schemas.openxmlformats.org/markup-compatibility/2006">
-        <mc:Choice xmlns:a14="http://schemas.microsoft.com/office/drawing/2010/main" Requires="a14">
+      <mc:AlternateContent xmlns:mc="http://schemas.openxmlformats.org/markup-compatibility/2006" xmlns:a14="http://schemas.microsoft.com/office/drawing/2010/main">
+        <mc:Choice Requires="a14">
           <p:sp>
             <p:nvSpPr>
               <p:cNvPr id="153" name="文本框 152">
@@ -8672,7 +8652,7 @@
             </p:txBody>
           </p:sp>
         </mc:Choice>
-        <mc:Fallback>
+        <mc:Fallback xmlns="">
           <p:sp>
             <p:nvSpPr>
               <p:cNvPr id="153" name="文本框 152">
@@ -8696,7 +8676,7 @@
                 <a:avLst/>
               </a:prstGeom>
               <a:blipFill>
-                <a:blip r:embed="rId91"/>
+                <a:blip r:embed="rId92"/>
                 <a:stretch>
                   <a:fillRect b="-4082"/>
                 </a:stretch>
@@ -8717,8 +8697,8 @@
           </p:sp>
         </mc:Fallback>
       </mc:AlternateContent>
-      <mc:AlternateContent xmlns:mc="http://schemas.openxmlformats.org/markup-compatibility/2006">
-        <mc:Choice xmlns:a14="http://schemas.microsoft.com/office/drawing/2010/main" Requires="a14">
+      <mc:AlternateContent xmlns:mc="http://schemas.openxmlformats.org/markup-compatibility/2006" xmlns:a14="http://schemas.microsoft.com/office/drawing/2010/main">
+        <mc:Choice Requires="a14">
           <p:sp>
             <p:nvSpPr>
               <p:cNvPr id="154" name="文本框 153">
@@ -8793,7 +8773,7 @@
             </p:txBody>
           </p:sp>
         </mc:Choice>
-        <mc:Fallback>
+        <mc:Fallback xmlns="">
           <p:sp>
             <p:nvSpPr>
               <p:cNvPr id="154" name="文本框 153">
@@ -8817,7 +8797,7 @@
                 <a:avLst/>
               </a:prstGeom>
               <a:blipFill>
-                <a:blip r:embed="rId89"/>
+                <a:blip r:embed="rId90"/>
                 <a:stretch>
                   <a:fillRect b="-6250"/>
                 </a:stretch>
@@ -8838,8 +8818,8 @@
           </p:sp>
         </mc:Fallback>
       </mc:AlternateContent>
-      <mc:AlternateContent xmlns:mc="http://schemas.openxmlformats.org/markup-compatibility/2006">
-        <mc:Choice xmlns:a14="http://schemas.microsoft.com/office/drawing/2010/main" Requires="a14">
+      <mc:AlternateContent xmlns:mc="http://schemas.openxmlformats.org/markup-compatibility/2006" xmlns:a14="http://schemas.microsoft.com/office/drawing/2010/main">
+        <mc:Choice Requires="a14">
           <p:sp>
             <p:nvSpPr>
               <p:cNvPr id="155" name="文本框 154">
@@ -8914,7 +8894,7 @@
             </p:txBody>
           </p:sp>
         </mc:Choice>
-        <mc:Fallback>
+        <mc:Fallback xmlns="">
           <p:sp>
             <p:nvSpPr>
               <p:cNvPr id="155" name="文本框 154">
@@ -8938,7 +8918,7 @@
                 <a:avLst/>
               </a:prstGeom>
               <a:blipFill>
-                <a:blip r:embed="rId89"/>
+                <a:blip r:embed="rId90"/>
                 <a:stretch>
                   <a:fillRect b="-6250"/>
                 </a:stretch>
@@ -9195,8 +9175,8 @@
           </a:fontRef>
         </p:style>
       </p:cxnSp>
-      <mc:AlternateContent xmlns:mc="http://schemas.openxmlformats.org/markup-compatibility/2006">
-        <mc:Choice xmlns:a14="http://schemas.microsoft.com/office/drawing/2010/main" Requires="a14">
+      <mc:AlternateContent xmlns:mc="http://schemas.openxmlformats.org/markup-compatibility/2006" xmlns:a14="http://schemas.microsoft.com/office/drawing/2010/main">
+        <mc:Choice Requires="a14">
           <p:sp>
             <p:nvSpPr>
               <p:cNvPr id="167" name="文本框 166">
@@ -9250,7 +9230,7 @@
             </p:txBody>
           </p:sp>
         </mc:Choice>
-        <mc:Fallback>
+        <mc:Fallback xmlns="">
           <p:sp>
             <p:nvSpPr>
               <p:cNvPr id="167" name="文本框 166">
@@ -9274,7 +9254,7 @@
                 <a:avLst/>
               </a:prstGeom>
               <a:blipFill>
-                <a:blip r:embed="rId92"/>
+                <a:blip r:embed="rId93"/>
                 <a:stretch>
                   <a:fillRect/>
                 </a:stretch>
@@ -9295,8 +9275,8 @@
           </p:sp>
         </mc:Fallback>
       </mc:AlternateContent>
-      <mc:AlternateContent xmlns:mc="http://schemas.openxmlformats.org/markup-compatibility/2006">
-        <mc:Choice xmlns:a14="http://schemas.microsoft.com/office/drawing/2010/main" Requires="a14">
+      <mc:AlternateContent xmlns:mc="http://schemas.openxmlformats.org/markup-compatibility/2006" xmlns:a14="http://schemas.microsoft.com/office/drawing/2010/main">
+        <mc:Choice Requires="a14">
           <p:sp>
             <p:nvSpPr>
               <p:cNvPr id="168" name="文本框 167">
@@ -9545,7 +9525,7 @@
             </p:txBody>
           </p:sp>
         </mc:Choice>
-        <mc:Fallback>
+        <mc:Fallback xmlns="">
           <p:sp>
             <p:nvSpPr>
               <p:cNvPr id="168" name="文本框 167">
@@ -9569,7 +9549,7 @@
                 <a:avLst/>
               </a:prstGeom>
               <a:blipFill>
-                <a:blip r:embed="rId93"/>
+                <a:blip r:embed="rId94"/>
                 <a:stretch>
                   <a:fillRect/>
                 </a:stretch>
@@ -9693,8 +9673,8 @@
           </a:fontRef>
         </p:style>
       </p:cxnSp>
-      <mc:AlternateContent xmlns:mc="http://schemas.openxmlformats.org/markup-compatibility/2006">
-        <mc:Choice xmlns:a14="http://schemas.microsoft.com/office/drawing/2010/main" Requires="a14">
+      <mc:AlternateContent xmlns:mc="http://schemas.openxmlformats.org/markup-compatibility/2006" xmlns:a14="http://schemas.microsoft.com/office/drawing/2010/main">
+        <mc:Choice Requires="a14">
           <p:sp>
             <p:nvSpPr>
               <p:cNvPr id="172" name="文本框 171">
@@ -9749,7 +9729,7 @@
             </p:txBody>
           </p:sp>
         </mc:Choice>
-        <mc:Fallback>
+        <mc:Fallback xmlns="">
           <p:sp>
             <p:nvSpPr>
               <p:cNvPr id="172" name="文本框 171">
@@ -9773,7 +9753,7 @@
                 <a:avLst/>
               </a:prstGeom>
               <a:blipFill>
-                <a:blip r:embed="rId94"/>
+                <a:blip r:embed="rId95"/>
                 <a:stretch>
                   <a:fillRect l="-625" b="-14583"/>
                 </a:stretch>
@@ -9796,44 +9776,6 @@
       </mc:AlternateContent>
       <p:sp>
         <p:nvSpPr>
-          <p:cNvPr id="173" name="文本框 172">
-            <a:extLst>
-              <a:ext uri="{FF2B5EF4-FFF2-40B4-BE49-F238E27FC236}">
-                <a16:creationId xmlns:a16="http://schemas.microsoft.com/office/drawing/2014/main" id="{42B9CF3D-72BB-41DE-B21B-7911899F7B88}"/>
-              </a:ext>
-            </a:extLst>
-          </p:cNvPr>
-          <p:cNvSpPr txBox="1"/>
-          <p:nvPr/>
-        </p:nvSpPr>
-        <p:spPr>
-          <a:xfrm>
-            <a:off x="5208469" y="4798054"/>
-            <a:ext cx="1630082" cy="291424"/>
-          </a:xfrm>
-          <a:prstGeom prst="rect">
-            <a:avLst/>
-          </a:prstGeom>
-          <a:noFill/>
-        </p:spPr>
-        <p:txBody>
-          <a:bodyPr wrap="square" rtlCol="0">
-            <a:spAutoFit/>
-          </a:bodyPr>
-          <a:lstStyle/>
-          <a:p>
-            <a:r>
-              <a:rPr lang="zh-CN" altLang="en-US" sz="1268" dirty="0">
-                <a:latin typeface="宋体" panose="02010600030101010101" pitchFamily="2" charset="-122"/>
-                <a:ea typeface="宋体" panose="02010600030101010101" pitchFamily="2" charset="-122"/>
-              </a:rPr>
-              <a:t>多样性评估模块</a:t>
-            </a:r>
-          </a:p>
-        </p:txBody>
-      </p:sp>
-      <p:sp>
-        <p:nvSpPr>
           <p:cNvPr id="66" name="矩形 65">
             <a:extLst>
               <a:ext uri="{FF2B5EF4-FFF2-40B4-BE49-F238E27FC236}">
@@ -9846,68 +9788,14 @@
         </p:nvSpPr>
         <p:spPr>
           <a:xfrm>
-            <a:off x="8811040" y="1828278"/>
-            <a:ext cx="2104686" cy="2837015"/>
+            <a:off x="8811040" y="2138394"/>
+            <a:ext cx="2104686" cy="2526899"/>
           </a:xfrm>
           <a:prstGeom prst="rect">
             <a:avLst/>
           </a:prstGeom>
           <a:solidFill>
-            <a:srgbClr val="E1EDD7"/>
-          </a:solidFill>
-          <a:ln>
-            <a:solidFill>
-              <a:srgbClr val="6B8B51"/>
-            </a:solidFill>
-          </a:ln>
-        </p:spPr>
-        <p:style>
-          <a:lnRef idx="2">
-            <a:schemeClr val="accent1">
-              <a:shade val="50000"/>
-            </a:schemeClr>
-          </a:lnRef>
-          <a:fillRef idx="1">
-            <a:schemeClr val="accent1"/>
-          </a:fillRef>
-          <a:effectRef idx="0">
-            <a:schemeClr val="accent1"/>
-          </a:effectRef>
-          <a:fontRef idx="minor">
-            <a:schemeClr val="lt1"/>
-          </a:fontRef>
-        </p:style>
-        <p:txBody>
-          <a:bodyPr rtlCol="0" anchor="ctr"/>
-          <a:lstStyle/>
-          <a:p>
-            <a:pPr algn="ctr"/>
-            <a:endParaRPr lang="zh-CN" altLang="en-US" sz="1902" dirty="0"/>
-          </a:p>
-        </p:txBody>
-      </p:sp>
-      <p:sp>
-        <p:nvSpPr>
-          <p:cNvPr id="227" name="箭头: 右 226">
-            <a:extLst>
-              <a:ext uri="{FF2B5EF4-FFF2-40B4-BE49-F238E27FC236}">
-                <a16:creationId xmlns:a16="http://schemas.microsoft.com/office/drawing/2014/main" id="{F8AB47E7-3656-47C5-AEAE-8D71B2CD8429}"/>
-              </a:ext>
-            </a:extLst>
-          </p:cNvPr>
-          <p:cNvSpPr/>
-          <p:nvPr/>
-        </p:nvSpPr>
-        <p:spPr>
-          <a:xfrm>
-            <a:off x="3193161" y="4238821"/>
-            <a:ext cx="5617442" cy="157662"/>
-          </a:xfrm>
-          <a:prstGeom prst="rightArrow">
-            <a:avLst/>
-          </a:prstGeom>
-          <a:solidFill>
-            <a:srgbClr val="006BB9"/>
+            <a:srgbClr val="E5F6DA"/>
           </a:solidFill>
           <a:ln>
             <a:noFill/>
@@ -9934,12 +9822,66 @@
           <a:lstStyle/>
           <a:p>
             <a:pPr algn="ctr"/>
-            <a:endParaRPr lang="zh-CN" altLang="en-US" sz="1902"/>
+            <a:endParaRPr lang="zh-CN" altLang="en-US" sz="1902" dirty="0"/>
           </a:p>
         </p:txBody>
       </p:sp>
-      <mc:AlternateContent xmlns:mc="http://schemas.openxmlformats.org/markup-compatibility/2006">
-        <mc:Choice xmlns:a14="http://schemas.microsoft.com/office/drawing/2010/main" Requires="a14">
+      <p:sp>
+        <p:nvSpPr>
+          <p:cNvPr id="227" name="箭头: 右 226">
+            <a:extLst>
+              <a:ext uri="{FF2B5EF4-FFF2-40B4-BE49-F238E27FC236}">
+                <a16:creationId xmlns:a16="http://schemas.microsoft.com/office/drawing/2014/main" id="{F8AB47E7-3656-47C5-AEAE-8D71B2CD8429}"/>
+              </a:ext>
+            </a:extLst>
+          </p:cNvPr>
+          <p:cNvSpPr/>
+          <p:nvPr/>
+        </p:nvSpPr>
+        <p:spPr>
+          <a:xfrm>
+            <a:off x="3193161" y="4238821"/>
+            <a:ext cx="5617442" cy="157662"/>
+          </a:xfrm>
+          <a:prstGeom prst="rightArrow">
+            <a:avLst/>
+          </a:prstGeom>
+          <a:solidFill>
+            <a:schemeClr val="bg1">
+              <a:lumMod val="50000"/>
+            </a:schemeClr>
+          </a:solidFill>
+          <a:ln>
+            <a:noFill/>
+          </a:ln>
+        </p:spPr>
+        <p:style>
+          <a:lnRef idx="2">
+            <a:schemeClr val="accent1">
+              <a:shade val="50000"/>
+            </a:schemeClr>
+          </a:lnRef>
+          <a:fillRef idx="1">
+            <a:schemeClr val="accent1"/>
+          </a:fillRef>
+          <a:effectRef idx="0">
+            <a:schemeClr val="accent1"/>
+          </a:effectRef>
+          <a:fontRef idx="minor">
+            <a:schemeClr val="lt1"/>
+          </a:fontRef>
+        </p:style>
+        <p:txBody>
+          <a:bodyPr rtlCol="0" anchor="ctr"/>
+          <a:lstStyle/>
+          <a:p>
+            <a:pPr algn="ctr"/>
+            <a:endParaRPr lang="zh-CN" altLang="en-US" sz="1902"/>
+          </a:p>
+        </p:txBody>
+      </p:sp>
+      <mc:AlternateContent xmlns:mc="http://schemas.openxmlformats.org/markup-compatibility/2006" xmlns:a14="http://schemas.microsoft.com/office/drawing/2010/main">
+        <mc:Choice Requires="a14">
           <p:sp>
             <p:nvSpPr>
               <p:cNvPr id="71" name="文本框 70">
@@ -9955,7 +9897,7 @@
             <p:spPr>
               <a:xfrm>
                 <a:off x="3193990" y="3988312"/>
-                <a:ext cx="928588" cy="287451"/>
+                <a:ext cx="1128835" cy="338554"/>
               </a:xfrm>
               <a:prstGeom prst="rect">
                 <a:avLst/>
@@ -9969,7 +9911,7 @@
               <a:lstStyle/>
               <a:p>
                 <a:r>
-                  <a:rPr lang="zh-CN" altLang="en-US" sz="1268" dirty="0">
+                  <a:rPr lang="zh-CN" altLang="en-US" sz="1600" dirty="0">
                     <a:latin typeface="宋体" panose="02010600030101010101" pitchFamily="2" charset="-122"/>
                     <a:ea typeface="宋体" panose="02010600030101010101" pitchFamily="2" charset="-122"/>
                   </a:rPr>
@@ -9978,7 +9920,7 @@
                 <a14:m>
                   <m:oMath xmlns:m="http://schemas.openxmlformats.org/officeDocument/2006/math">
                     <m:r>
-                      <a:rPr lang="zh-CN" altLang="en-US" sz="1268" b="1" i="1" smtClean="0">
+                      <a:rPr lang="zh-CN" altLang="en-US" sz="1600" b="1" i="1" smtClean="0">
                         <a:latin typeface="Cambria Math" panose="02040503050406030204" pitchFamily="18" charset="0"/>
                         <a:ea typeface="宋体" panose="02010600030101010101" pitchFamily="2" charset="-122"/>
                       </a:rPr>
@@ -9986,7 +9928,7 @@
                     </m:r>
                   </m:oMath>
                 </a14:m>
-                <a:endParaRPr lang="zh-CN" altLang="en-US" sz="1268" b="1" i="1" dirty="0">
+                <a:endParaRPr lang="zh-CN" altLang="en-US" sz="1600" b="1" i="1" dirty="0">
                   <a:latin typeface="宋体" panose="02010600030101010101" pitchFamily="2" charset="-122"/>
                   <a:ea typeface="宋体" panose="02010600030101010101" pitchFamily="2" charset="-122"/>
                 </a:endParaRPr>
@@ -9994,7 +9936,7 @@
             </p:txBody>
           </p:sp>
         </mc:Choice>
-        <mc:Fallback>
+        <mc:Fallback xmlns="">
           <p:sp>
             <p:nvSpPr>
               <p:cNvPr id="71" name="文本框 70">
@@ -10012,15 +9954,15 @@
             <p:spPr>
               <a:xfrm>
                 <a:off x="3193990" y="3988312"/>
-                <a:ext cx="928588" cy="287451"/>
+                <a:ext cx="1128835" cy="338554"/>
               </a:xfrm>
               <a:prstGeom prst="rect">
                 <a:avLst/>
               </a:prstGeom>
               <a:blipFill>
-                <a:blip r:embed="rId95"/>
+                <a:blip r:embed="rId96"/>
                 <a:stretch>
-                  <a:fillRect l="-658" b="-17021"/>
+                  <a:fillRect l="-3243" t="-7143" b="-19643"/>
                 </a:stretch>
               </a:blipFill>
             </p:spPr>
@@ -10060,7 +10002,9 @@
             <a:avLst/>
           </a:prstGeom>
           <a:solidFill>
-            <a:srgbClr val="723699"/>
+            <a:schemeClr val="bg1">
+              <a:lumMod val="50000"/>
+            </a:schemeClr>
           </a:solidFill>
           <a:ln>
             <a:noFill/>
@@ -10105,8 +10049,8 @@
         </p:nvSpPr>
         <p:spPr>
           <a:xfrm>
-            <a:off x="4313199" y="4506076"/>
-            <a:ext cx="817967" cy="281831"/>
+            <a:off x="4069720" y="4466211"/>
+            <a:ext cx="1005403" cy="338554"/>
           </a:xfrm>
           <a:prstGeom prst="rect">
             <a:avLst/>
@@ -10120,7 +10064,7 @@
           <a:lstStyle/>
           <a:p>
             <a:r>
-              <a:rPr lang="zh-CN" altLang="en-US" sz="1268" dirty="0">
+              <a:rPr lang="zh-CN" altLang="en-US" sz="1600" dirty="0">
                 <a:latin typeface="宋体" panose="02010600030101010101" pitchFamily="2" charset="-122"/>
                 <a:ea typeface="宋体" panose="02010600030101010101" pitchFamily="2" charset="-122"/>
               </a:rPr>
@@ -10143,8 +10087,8 @@
         </p:nvSpPr>
         <p:spPr>
           <a:xfrm>
-            <a:off x="7969923" y="3997251"/>
-            <a:ext cx="817967" cy="281831"/>
+            <a:off x="7833621" y="3955774"/>
+            <a:ext cx="1005403" cy="338554"/>
           </a:xfrm>
           <a:prstGeom prst="rect">
             <a:avLst/>
@@ -10158,7 +10102,7 @@
           <a:lstStyle/>
           <a:p>
             <a:r>
-              <a:rPr lang="zh-CN" altLang="en-US" sz="1268" dirty="0">
+              <a:rPr lang="zh-CN" altLang="en-US" sz="1600" dirty="0">
                 <a:latin typeface="宋体" panose="02010600030101010101" pitchFamily="2" charset="-122"/>
                 <a:ea typeface="宋体" panose="02010600030101010101" pitchFamily="2" charset="-122"/>
               </a:rPr>
@@ -10188,7 +10132,7 @@
             <a:avLst/>
           </a:prstGeom>
           <a:solidFill>
-            <a:srgbClr val="EE8A31"/>
+            <a:srgbClr val="7F7F7F"/>
           </a:solidFill>
           <a:ln>
             <a:noFill/>
@@ -10233,8 +10177,8 @@
         </p:nvSpPr>
         <p:spPr>
           <a:xfrm>
-            <a:off x="4611132" y="3662319"/>
-            <a:ext cx="817967" cy="281831"/>
+            <a:off x="4611347" y="3812114"/>
+            <a:ext cx="1005403" cy="338554"/>
           </a:xfrm>
           <a:prstGeom prst="rect">
             <a:avLst/>
@@ -10248,73 +10192,12 @@
           <a:lstStyle/>
           <a:p>
             <a:r>
-              <a:rPr lang="zh-CN" altLang="en-US" sz="1268" dirty="0">
+              <a:rPr lang="zh-CN" altLang="en-US" sz="1600" dirty="0">
                 <a:latin typeface="宋体" panose="02010600030101010101" pitchFamily="2" charset="-122"/>
                 <a:ea typeface="宋体" panose="02010600030101010101" pitchFamily="2" charset="-122"/>
               </a:rPr>
               <a:t>几何约束</a:t>
             </a:r>
-          </a:p>
-        </p:txBody>
-      </p:sp>
-      <p:sp>
-        <p:nvSpPr>
-          <p:cNvPr id="83" name="箭头: 圆角右 82">
-            <a:extLst>
-              <a:ext uri="{FF2B5EF4-FFF2-40B4-BE49-F238E27FC236}">
-                <a16:creationId xmlns:a16="http://schemas.microsoft.com/office/drawing/2014/main" id="{48B3FF18-9A56-467E-9B43-610DDC09856F}"/>
-              </a:ext>
-            </a:extLst>
-          </p:cNvPr>
-          <p:cNvSpPr/>
-          <p:nvPr/>
-        </p:nvSpPr>
-        <p:spPr>
-          <a:xfrm rot="5400000">
-            <a:off x="9020076" y="871432"/>
-            <a:ext cx="371133" cy="1539154"/>
-          </a:xfrm>
-          <a:prstGeom prst="bentArrow">
-            <a:avLst>
-              <a:gd name="adj1" fmla="val 25000"/>
-              <a:gd name="adj2" fmla="val 27918"/>
-              <a:gd name="adj3" fmla="val 25000"/>
-              <a:gd name="adj4" fmla="val 47104"/>
-            </a:avLst>
-          </a:prstGeom>
-          <a:solidFill>
-            <a:srgbClr val="EE8A31"/>
-          </a:solidFill>
-          <a:ln>
-            <a:noFill/>
-          </a:ln>
-        </p:spPr>
-        <p:style>
-          <a:lnRef idx="2">
-            <a:schemeClr val="accent1">
-              <a:shade val="50000"/>
-            </a:schemeClr>
-          </a:lnRef>
-          <a:fillRef idx="1">
-            <a:schemeClr val="accent1"/>
-          </a:fillRef>
-          <a:effectRef idx="0">
-            <a:schemeClr val="accent1"/>
-          </a:effectRef>
-          <a:fontRef idx="minor">
-            <a:schemeClr val="lt1"/>
-          </a:fontRef>
-        </p:style>
-        <p:txBody>
-          <a:bodyPr rtlCol="0" anchor="ctr"/>
-          <a:lstStyle/>
-          <a:p>
-            <a:pPr algn="ctr"/>
-            <a:endParaRPr lang="zh-CN" altLang="en-US" sz="1902" dirty="0">
-              <a:solidFill>
-                <a:schemeClr val="tx1"/>
-              </a:solidFill>
-            </a:endParaRPr>
           </a:p>
         </p:txBody>
       </p:sp>
@@ -10333,7 +10216,7 @@
         <p:spPr>
           <a:xfrm>
             <a:off x="8720006" y="1186729"/>
-            <a:ext cx="817967" cy="281831"/>
+            <a:ext cx="1005403" cy="338554"/>
           </a:xfrm>
           <a:prstGeom prst="rect">
             <a:avLst/>
@@ -10347,7 +10230,7 @@
           <a:lstStyle/>
           <a:p>
             <a:r>
-              <a:rPr lang="zh-CN" altLang="en-US" sz="1268" dirty="0">
+              <a:rPr lang="zh-CN" altLang="en-US" sz="1600" dirty="0">
                 <a:latin typeface="宋体" panose="02010600030101010101" pitchFamily="2" charset="-122"/>
                 <a:ea typeface="宋体" panose="02010600030101010101" pitchFamily="2" charset="-122"/>
               </a:rPr>
@@ -10374,10 +10257,12 @@
             <a:ext cx="1917064" cy="873680"/>
           </a:xfrm>
           <a:prstGeom prst="roundRect">
-            <a:avLst/>
+            <a:avLst>
+              <a:gd name="adj" fmla="val 0"/>
+            </a:avLst>
           </a:prstGeom>
           <a:solidFill>
-            <a:srgbClr val="C9DEB3"/>
+            <a:srgbClr val="E5F6DA"/>
           </a:solidFill>
           <a:ln>
             <a:solidFill>
@@ -10448,8 +10333,8 @@
           </a:p>
         </p:txBody>
       </p:sp>
-      <mc:AlternateContent xmlns:mc="http://schemas.openxmlformats.org/markup-compatibility/2006">
-        <mc:Choice xmlns:a14="http://schemas.microsoft.com/office/drawing/2010/main" Requires="a14">
+      <mc:AlternateContent xmlns:mc="http://schemas.openxmlformats.org/markup-compatibility/2006" xmlns:a14="http://schemas.microsoft.com/office/drawing/2010/main">
+        <mc:Choice Requires="a14">
           <p:sp>
             <p:nvSpPr>
               <p:cNvPr id="234" name="文本框 233">
@@ -10639,7 +10524,7 @@
             </p:txBody>
           </p:sp>
         </mc:Choice>
-        <mc:Fallback>
+        <mc:Fallback xmlns="">
           <p:sp>
             <p:nvSpPr>
               <p:cNvPr id="234" name="文本框 233">
@@ -10663,7 +10548,7 @@
                 <a:avLst/>
               </a:prstGeom>
               <a:blipFill>
-                <a:blip r:embed="rId96"/>
+                <a:blip r:embed="rId97"/>
                 <a:stretch>
                   <a:fillRect/>
                 </a:stretch>
@@ -10702,10 +10587,12 @@
             <a:ext cx="1917064" cy="873680"/>
           </a:xfrm>
           <a:prstGeom prst="roundRect">
-            <a:avLst/>
+            <a:avLst>
+              <a:gd name="adj" fmla="val 0"/>
+            </a:avLst>
           </a:prstGeom>
           <a:solidFill>
-            <a:srgbClr val="C9DEB3"/>
+            <a:srgbClr val="E5F6DA"/>
           </a:solidFill>
           <a:ln>
             <a:solidFill>
@@ -10776,8 +10663,8 @@
           </a:p>
         </p:txBody>
       </p:sp>
-      <mc:AlternateContent xmlns:mc="http://schemas.openxmlformats.org/markup-compatibility/2006">
-        <mc:Choice xmlns:a14="http://schemas.microsoft.com/office/drawing/2010/main" Requires="a14">
+      <mc:AlternateContent xmlns:mc="http://schemas.openxmlformats.org/markup-compatibility/2006" xmlns:a14="http://schemas.microsoft.com/office/drawing/2010/main">
+        <mc:Choice Requires="a14">
           <p:sp>
             <p:nvSpPr>
               <p:cNvPr id="239" name="文本框 238">
@@ -10957,7 +10844,7 @@
             </p:txBody>
           </p:sp>
         </mc:Choice>
-        <mc:Fallback>
+        <mc:Fallback xmlns="">
           <p:sp>
             <p:nvSpPr>
               <p:cNvPr id="239" name="文本框 238">
@@ -10981,7 +10868,7 @@
                 <a:avLst/>
               </a:prstGeom>
               <a:blipFill>
-                <a:blip r:embed="rId97"/>
+                <a:blip r:embed="rId98"/>
                 <a:stretch>
                   <a:fillRect b="-13462"/>
                 </a:stretch>
@@ -11016,8 +10903,8 @@
         </p:nvSpPr>
         <p:spPr>
           <a:xfrm>
-            <a:off x="9210395" y="1820241"/>
-            <a:ext cx="1345417" cy="291424"/>
+            <a:off x="8742926" y="1788542"/>
+            <a:ext cx="2236510" cy="338554"/>
           </a:xfrm>
           <a:prstGeom prst="rect">
             <a:avLst/>
@@ -11031,7 +10918,14 @@
           <a:lstStyle/>
           <a:p>
             <a:r>
-              <a:rPr lang="zh-CN" altLang="en-US" sz="1268" dirty="0">
+              <a:rPr lang="en-US" altLang="zh-CN" sz="1600" dirty="0">
+                <a:latin typeface="宋体" panose="02010600030101010101" pitchFamily="2" charset="-122"/>
+                <a:ea typeface="宋体" panose="02010600030101010101" pitchFamily="2" charset="-122"/>
+              </a:rPr>
+              <a:t>(d)LWM</a:t>
+            </a:r>
+            <a:r>
+              <a:rPr lang="zh-CN" altLang="en-US" sz="1600" dirty="0">
                 <a:latin typeface="宋体" panose="02010600030101010101" pitchFamily="2" charset="-122"/>
                 <a:ea typeface="宋体" panose="02010600030101010101" pitchFamily="2" charset="-122"/>
               </a:rPr>
@@ -11092,8 +10986,8 @@
           </a:p>
         </p:txBody>
       </p:sp>
-      <mc:AlternateContent xmlns:mc="http://schemas.openxmlformats.org/markup-compatibility/2006">
-        <mc:Choice xmlns:a14="http://schemas.microsoft.com/office/drawing/2010/main" Requires="a14">
+      <mc:AlternateContent xmlns:mc="http://schemas.openxmlformats.org/markup-compatibility/2006" xmlns:a14="http://schemas.microsoft.com/office/drawing/2010/main">
+        <mc:Choice Requires="a14">
           <p:sp>
             <p:nvSpPr>
               <p:cNvPr id="242" name="文本框 241">
@@ -11148,7 +11042,7 @@
             </p:txBody>
           </p:sp>
         </mc:Choice>
-        <mc:Fallback>
+        <mc:Fallback xmlns="">
           <p:sp>
             <p:nvSpPr>
               <p:cNvPr id="242" name="文本框 241">
@@ -11172,7 +11066,7 @@
                 <a:avLst/>
               </a:prstGeom>
               <a:blipFill>
-                <a:blip r:embed="rId98"/>
+                <a:blip r:embed="rId99"/>
                 <a:stretch>
                   <a:fillRect l="-971" t="-2174" b="-19565"/>
                 </a:stretch>
@@ -11207,14 +11101,20 @@
         </p:nvSpPr>
         <p:spPr>
           <a:xfrm>
-            <a:off x="8487392" y="4665292"/>
-            <a:ext cx="1558694" cy="549507"/>
+            <a:off x="8487393" y="4674380"/>
+            <a:ext cx="1510495" cy="1152174"/>
           </a:xfrm>
           <a:prstGeom prst="bentUpArrow">
-            <a:avLst/>
+            <a:avLst>
+              <a:gd name="adj1" fmla="val 9244"/>
+              <a:gd name="adj2" fmla="val 8953"/>
+              <a:gd name="adj3" fmla="val 15663"/>
+            </a:avLst>
           </a:prstGeom>
           <a:solidFill>
-            <a:srgbClr val="723699"/>
+            <a:schemeClr val="bg1">
+              <a:lumMod val="50000"/>
+            </a:schemeClr>
           </a:solidFill>
           <a:ln>
             <a:noFill/>
@@ -11245,8 +11145,8 @@
           </a:p>
         </p:txBody>
       </p:sp>
-      <mc:AlternateContent xmlns:mc="http://schemas.openxmlformats.org/markup-compatibility/2006">
-        <mc:Choice xmlns:a14="http://schemas.microsoft.com/office/drawing/2010/main" Requires="a14">
+      <mc:AlternateContent xmlns:mc="http://schemas.openxmlformats.org/markup-compatibility/2006" xmlns:a14="http://schemas.microsoft.com/office/drawing/2010/main">
+        <mc:Choice Requires="a14">
           <p:sp>
             <p:nvSpPr>
               <p:cNvPr id="243" name="文本框 242">
@@ -11261,8 +11161,8 @@
             </p:nvSpPr>
             <p:spPr>
               <a:xfrm>
-                <a:off x="8668708" y="4798054"/>
-                <a:ext cx="850755" cy="287817"/>
+                <a:off x="8847057" y="5387247"/>
+                <a:ext cx="1014124" cy="338554"/>
               </a:xfrm>
               <a:prstGeom prst="rect">
                 <a:avLst/>
@@ -11276,7 +11176,7 @@
               <a:lstStyle/>
               <a:p>
                 <a:r>
-                  <a:rPr lang="zh-CN" altLang="en-US" sz="1268" dirty="0">
+                  <a:rPr lang="zh-CN" altLang="en-US" sz="1600" dirty="0">
                     <a:latin typeface="宋体" panose="02010600030101010101" pitchFamily="2" charset="-122"/>
                     <a:ea typeface="宋体" panose="02010600030101010101" pitchFamily="2" charset="-122"/>
                   </a:rPr>
@@ -11287,7 +11187,7 @@
                     <m:sSub>
                       <m:sSubPr>
                         <m:ctrlPr>
-                          <a:rPr lang="en-US" altLang="zh-CN" sz="1268" i="1">
+                          <a:rPr lang="en-US" altLang="zh-CN" sz="1600" i="1">
                             <a:latin typeface="Cambria Math" panose="02040503050406030204" pitchFamily="18" charset="0"/>
                             <a:ea typeface="宋体" panose="02010600030101010101" pitchFamily="2" charset="-122"/>
                           </a:rPr>
@@ -11295,7 +11195,7 @@
                       </m:sSubPr>
                       <m:e>
                         <m:r>
-                          <a:rPr lang="en-US" altLang="zh-CN" sz="1268" i="1">
+                          <a:rPr lang="en-US" altLang="zh-CN" sz="1600">
                             <a:latin typeface="Cambria Math" panose="02040503050406030204" pitchFamily="18" charset="0"/>
                             <a:ea typeface="宋体" panose="02010600030101010101" pitchFamily="2" charset="-122"/>
                           </a:rPr>
@@ -11304,7 +11204,7 @@
                       </m:e>
                       <m:sub>
                         <m:r>
-                          <a:rPr lang="en-US" altLang="zh-CN" sz="1268" i="1">
+                          <a:rPr lang="en-US" altLang="zh-CN" sz="1600">
                             <a:latin typeface="Cambria Math" panose="02040503050406030204" pitchFamily="18" charset="0"/>
                             <a:ea typeface="宋体" panose="02010600030101010101" pitchFamily="2" charset="-122"/>
                           </a:rPr>
@@ -11314,7 +11214,7 @@
                     </m:sSub>
                   </m:oMath>
                 </a14:m>
-                <a:endParaRPr lang="zh-CN" altLang="en-US" sz="1268" dirty="0">
+                <a:endParaRPr lang="zh-CN" altLang="en-US" sz="1600" dirty="0">
                   <a:latin typeface="宋体" panose="02010600030101010101" pitchFamily="2" charset="-122"/>
                   <a:ea typeface="宋体" panose="02010600030101010101" pitchFamily="2" charset="-122"/>
                 </a:endParaRPr>
@@ -11322,7 +11222,7 @@
             </p:txBody>
           </p:sp>
         </mc:Choice>
-        <mc:Fallback>
+        <mc:Fallback xmlns="">
           <p:sp>
             <p:nvSpPr>
               <p:cNvPr id="243" name="文本框 242">
@@ -11339,16 +11239,16 @@
             </p:nvSpPr>
             <p:spPr>
               <a:xfrm>
-                <a:off x="8668708" y="4798054"/>
-                <a:ext cx="850755" cy="287817"/>
+                <a:off x="8847057" y="5387247"/>
+                <a:ext cx="1014124" cy="338554"/>
               </a:xfrm>
               <a:prstGeom prst="rect">
                 <a:avLst/>
               </a:prstGeom>
               <a:blipFill>
-                <a:blip r:embed="rId99"/>
+                <a:blip r:embed="rId100"/>
                 <a:stretch>
-                  <a:fillRect l="-714" t="-2128" b="-17021"/>
+                  <a:fillRect l="-2994" t="-7273" b="-21818"/>
                 </a:stretch>
               </a:blipFill>
             </p:spPr>
@@ -11385,13 +11285,13 @@
         </p:nvCxnSpPr>
         <p:spPr>
           <a:xfrm flipH="1">
-            <a:off x="1789644" y="3246786"/>
-            <a:ext cx="9126082" cy="3095194"/>
+            <a:off x="1789644" y="3401844"/>
+            <a:ext cx="9126082" cy="2940136"/>
           </a:xfrm>
           <a:prstGeom prst="bentConnector4">
             <a:avLst>
               <a:gd name="adj1" fmla="val -2505"/>
-              <a:gd name="adj2" fmla="val 114989"/>
+              <a:gd name="adj2" fmla="val 116694"/>
             </a:avLst>
           </a:prstGeom>
           <a:ln w="25400">
@@ -11431,8 +11331,8 @@
         </p:nvSpPr>
         <p:spPr>
           <a:xfrm>
-            <a:off x="9296769" y="6448035"/>
-            <a:ext cx="1675030" cy="291424"/>
+            <a:off x="9118621" y="6441047"/>
+            <a:ext cx="2031325" cy="338554"/>
           </a:xfrm>
           <a:prstGeom prst="rect">
             <a:avLst/>
@@ -11446,7 +11346,7 @@
           <a:lstStyle/>
           <a:p>
             <a:r>
-              <a:rPr lang="zh-CN" altLang="en-US" sz="1268" dirty="0">
+              <a:rPr lang="zh-CN" altLang="en-US" sz="1600" dirty="0">
                 <a:latin typeface="宋体" panose="02010600030101010101" pitchFamily="2" charset="-122"/>
                 <a:ea typeface="宋体" panose="02010600030101010101" pitchFamily="2" charset="-122"/>
               </a:rPr>
@@ -11455,42 +11355,6 @@
           </a:p>
         </p:txBody>
       </p:sp>
-      <p:pic>
-        <p:nvPicPr>
-          <p:cNvPr id="249" name="图片 248">
-            <a:extLst>
-              <a:ext uri="{FF2B5EF4-FFF2-40B4-BE49-F238E27FC236}">
-                <a16:creationId xmlns:a16="http://schemas.microsoft.com/office/drawing/2014/main" id="{0590194A-505F-49ED-8455-950ABD4DDE57}"/>
-              </a:ext>
-            </a:extLst>
-          </p:cNvPr>
-          <p:cNvPicPr>
-            <a:picLocks noChangeAspect="1"/>
-          </p:cNvPicPr>
-          <p:nvPr/>
-        </p:nvPicPr>
-        <p:blipFill>
-          <a:blip r:embed="rId100">
-            <a:extLst>
-              <a:ext uri="{28A0092B-C50C-407E-A947-70E740481C1C}">
-                <a14:useLocalDpi xmlns:a14="http://schemas.microsoft.com/office/drawing/2010/main" val="0"/>
-              </a:ext>
-            </a:extLst>
-          </a:blip>
-          <a:stretch>
-            <a:fillRect/>
-          </a:stretch>
-        </p:blipFill>
-        <p:spPr>
-          <a:xfrm>
-            <a:off x="3604088" y="214643"/>
-            <a:ext cx="4818879" cy="3317041"/>
-          </a:xfrm>
-          <a:prstGeom prst="rect">
-            <a:avLst/>
-          </a:prstGeom>
-        </p:spPr>
-      </p:pic>
       <p:sp>
         <p:nvSpPr>
           <p:cNvPr id="170" name="箭头: 右 169">
@@ -11505,8 +11369,8 @@
         </p:nvSpPr>
         <p:spPr>
           <a:xfrm rot="5400000">
-            <a:off x="1489630" y="1001764"/>
-            <a:ext cx="603721" cy="245906"/>
+            <a:off x="1609554" y="881842"/>
+            <a:ext cx="363874" cy="245906"/>
           </a:xfrm>
           <a:prstGeom prst="rightArrow">
             <a:avLst/>
@@ -11547,6 +11411,65 @@
       </p:sp>
       <p:sp>
         <p:nvSpPr>
+          <p:cNvPr id="13" name="矩形 12">
+            <a:extLst>
+              <a:ext uri="{FF2B5EF4-FFF2-40B4-BE49-F238E27FC236}">
+                <a16:creationId xmlns:a16="http://schemas.microsoft.com/office/drawing/2014/main" id="{F740BFBF-5DAB-4C28-8ECE-0030F1CE2E08}"/>
+              </a:ext>
+            </a:extLst>
+          </p:cNvPr>
+          <p:cNvSpPr/>
+          <p:nvPr/>
+        </p:nvSpPr>
+        <p:spPr>
+          <a:xfrm>
+            <a:off x="773720" y="1928016"/>
+            <a:ext cx="1958590" cy="1925388"/>
+          </a:xfrm>
+          <a:prstGeom prst="rect">
+            <a:avLst/>
+          </a:prstGeom>
+          <a:solidFill>
+            <a:schemeClr val="accent3">
+              <a:lumMod val="20000"/>
+              <a:lumOff val="80000"/>
+            </a:schemeClr>
+          </a:solidFill>
+          <a:ln>
+            <a:solidFill>
+              <a:schemeClr val="bg1">
+                <a:lumMod val="85000"/>
+              </a:schemeClr>
+            </a:solidFill>
+          </a:ln>
+        </p:spPr>
+        <p:style>
+          <a:lnRef idx="2">
+            <a:schemeClr val="accent1">
+              <a:shade val="50000"/>
+            </a:schemeClr>
+          </a:lnRef>
+          <a:fillRef idx="1">
+            <a:schemeClr val="accent1"/>
+          </a:fillRef>
+          <a:effectRef idx="0">
+            <a:schemeClr val="accent1"/>
+          </a:effectRef>
+          <a:fontRef idx="minor">
+            <a:schemeClr val="lt1"/>
+          </a:fontRef>
+        </p:style>
+        <p:txBody>
+          <a:bodyPr rtlCol="0" anchor="ctr"/>
+          <a:lstStyle/>
+          <a:p>
+            <a:pPr algn="ctr"/>
+            <a:endParaRPr lang="zh-CN" altLang="en-US" sz="1902"/>
+          </a:p>
+        </p:txBody>
+      </p:sp>
+      <p:sp>
+        <p:nvSpPr>
           <p:cNvPr id="162" name="矩形: 圆角 161">
             <a:extLst>
               <a:ext uri="{FF2B5EF4-FFF2-40B4-BE49-F238E27FC236}">
@@ -11559,7 +11482,7 @@
         </p:nvSpPr>
         <p:spPr>
           <a:xfrm>
-            <a:off x="1235638" y="2279494"/>
+            <a:off x="1166069" y="2035499"/>
             <a:ext cx="1245253" cy="574381"/>
           </a:xfrm>
           <a:prstGeom prst="roundRect">
@@ -11642,7 +11565,7 @@
         </p:nvSpPr>
         <p:spPr>
           <a:xfrm>
-            <a:off x="1232838" y="3148015"/>
+            <a:off x="1163269" y="2904020"/>
             <a:ext cx="1245253" cy="574381"/>
           </a:xfrm>
           <a:prstGeom prst="roundRect">
@@ -11731,8 +11654,8 @@
         </p:nvSpPr>
         <p:spPr>
           <a:xfrm>
-            <a:off x="1884253" y="1130676"/>
-            <a:ext cx="822747" cy="287451"/>
+            <a:off x="687380" y="1107210"/>
+            <a:ext cx="2230495" cy="338554"/>
           </a:xfrm>
           <a:prstGeom prst="rect">
             <a:avLst/>
@@ -11746,16 +11669,19 @@
           <a:lstStyle/>
           <a:p>
             <a:r>
-              <a:rPr lang="en-US" altLang="zh-CN" sz="1268" dirty="0">
+              <a:rPr lang="en-US" altLang="zh-CN" sz="1600" dirty="0">
                 <a:latin typeface="宋体" panose="02010600030101010101" pitchFamily="2" charset="-122"/>
                 <a:ea typeface="宋体" panose="02010600030101010101" pitchFamily="2" charset="-122"/>
               </a:rPr>
-              <a:t>(a)WPAT</a:t>
+              <a:t>(a)TFLM</a:t>
             </a:r>
-            <a:endParaRPr lang="zh-CN" altLang="en-US" sz="1268" dirty="0">
-              <a:latin typeface="宋体" panose="02010600030101010101" pitchFamily="2" charset="-122"/>
-              <a:ea typeface="宋体" panose="02010600030101010101" pitchFamily="2" charset="-122"/>
-            </a:endParaRPr>
+            <a:r>
+              <a:rPr lang="zh-CN" altLang="en-US" sz="1600" dirty="0">
+                <a:latin typeface="宋体" panose="02010600030101010101" pitchFamily="2" charset="-122"/>
+                <a:ea typeface="宋体" panose="02010600030101010101" pitchFamily="2" charset="-122"/>
+              </a:rPr>
+              <a:t>特征学习模块</a:t>
+            </a:r>
           </a:p>
         </p:txBody>
       </p:sp>
@@ -11773,8 +11699,8 @@
         </p:nvSpPr>
         <p:spPr>
           <a:xfrm>
-            <a:off x="5468953" y="3480703"/>
-            <a:ext cx="739076" cy="287451"/>
+            <a:off x="4936425" y="214567"/>
+            <a:ext cx="2176146" cy="338554"/>
           </a:xfrm>
           <a:prstGeom prst="rect">
             <a:avLst/>
@@ -11788,16 +11714,19 @@
           <a:lstStyle/>
           <a:p>
             <a:r>
-              <a:rPr lang="en-US" altLang="zh-CN" sz="1268" dirty="0">
+              <a:rPr lang="en-US" altLang="zh-CN" sz="1600" dirty="0">
                 <a:latin typeface="宋体" panose="02010600030101010101" pitchFamily="2" charset="-122"/>
                 <a:ea typeface="宋体" panose="02010600030101010101" pitchFamily="2" charset="-122"/>
               </a:rPr>
-              <a:t>(b)EMA</a:t>
+              <a:t>(b) CMM</a:t>
             </a:r>
-            <a:endParaRPr lang="zh-CN" altLang="en-US" sz="1268" dirty="0">
-              <a:latin typeface="宋体" panose="02010600030101010101" pitchFamily="2" charset="-122"/>
-              <a:ea typeface="宋体" panose="02010600030101010101" pitchFamily="2" charset="-122"/>
-            </a:endParaRPr>
+            <a:r>
+              <a:rPr lang="zh-CN" altLang="en-US" sz="1600" dirty="0">
+                <a:latin typeface="宋体" panose="02010600030101010101" pitchFamily="2" charset="-122"/>
+                <a:ea typeface="宋体" panose="02010600030101010101" pitchFamily="2" charset="-122"/>
+              </a:rPr>
+              <a:t>中心建模模块</a:t>
+            </a:r>
           </a:p>
         </p:txBody>
       </p:sp>
@@ -11815,8 +11744,8 @@
         </p:nvSpPr>
         <p:spPr>
           <a:xfrm>
-            <a:off x="5782384" y="4530572"/>
-            <a:ext cx="780908" cy="287451"/>
+            <a:off x="5794022" y="4468832"/>
+            <a:ext cx="2719252" cy="338554"/>
           </a:xfrm>
           <a:prstGeom prst="rect">
             <a:avLst/>
@@ -11830,25 +11759,589 @@
           <a:lstStyle/>
           <a:p>
             <a:r>
-              <a:rPr lang="en-US" altLang="zh-CN" sz="1268" dirty="0">
+              <a:rPr lang="en-US" altLang="zh-CN" sz="1600" dirty="0">
                 <a:latin typeface="宋体" panose="02010600030101010101" pitchFamily="2" charset="-122"/>
                 <a:ea typeface="宋体" panose="02010600030101010101" pitchFamily="2" charset="-122"/>
               </a:rPr>
-              <a:t>(c)IED</a:t>
+              <a:t>(c) DAM</a:t>
             </a:r>
-            <a:endParaRPr lang="zh-CN" altLang="en-US" sz="1268" dirty="0">
-              <a:latin typeface="宋体" panose="02010600030101010101" pitchFamily="2" charset="-122"/>
-              <a:ea typeface="宋体" panose="02010600030101010101" pitchFamily="2" charset="-122"/>
-            </a:endParaRPr>
+            <a:r>
+              <a:rPr lang="zh-CN" altLang="en-US" sz="1600" dirty="0">
+                <a:latin typeface="宋体" panose="02010600030101010101" pitchFamily="2" charset="-122"/>
+                <a:ea typeface="宋体" panose="02010600030101010101" pitchFamily="2" charset="-122"/>
+              </a:rPr>
+              <a:t>多样性评估模块</a:t>
+            </a:r>
           </a:p>
         </p:txBody>
       </p:sp>
       <p:sp>
         <p:nvSpPr>
-          <p:cNvPr id="179" name="文本框 178">
+          <p:cNvPr id="20" name="箭头: 直角上 19">
             <a:extLst>
               <a:ext uri="{FF2B5EF4-FFF2-40B4-BE49-F238E27FC236}">
-                <a16:creationId xmlns:a16="http://schemas.microsoft.com/office/drawing/2014/main" id="{7D83CFE0-23E7-4384-847C-A28EFE2A957F}"/>
+                <a16:creationId xmlns:a16="http://schemas.microsoft.com/office/drawing/2014/main" id="{5563BA1D-7D1F-4E58-9053-6AF0C05BE69D}"/>
+              </a:ext>
+            </a:extLst>
+          </p:cNvPr>
+          <p:cNvSpPr/>
+          <p:nvPr/>
+        </p:nvSpPr>
+        <p:spPr>
+          <a:xfrm rot="10800000" flipH="1">
+            <a:off x="8422967" y="1082550"/>
+            <a:ext cx="1587456" cy="787034"/>
+          </a:xfrm>
+          <a:prstGeom prst="bentUpArrow">
+            <a:avLst>
+              <a:gd name="adj1" fmla="val 14780"/>
+              <a:gd name="adj2" fmla="val 15928"/>
+              <a:gd name="adj3" fmla="val 16753"/>
+            </a:avLst>
+          </a:prstGeom>
+          <a:solidFill>
+            <a:schemeClr val="bg1">
+              <a:lumMod val="50000"/>
+            </a:schemeClr>
+          </a:solidFill>
+          <a:ln>
+            <a:noFill/>
+          </a:ln>
+        </p:spPr>
+        <p:style>
+          <a:lnRef idx="2">
+            <a:schemeClr val="accent1">
+              <a:shade val="50000"/>
+            </a:schemeClr>
+          </a:lnRef>
+          <a:fillRef idx="1">
+            <a:schemeClr val="accent1"/>
+          </a:fillRef>
+          <a:effectRef idx="0">
+            <a:schemeClr val="accent1"/>
+          </a:effectRef>
+          <a:fontRef idx="minor">
+            <a:schemeClr val="lt1"/>
+          </a:fontRef>
+        </p:style>
+        <p:txBody>
+          <a:bodyPr rtlCol="0" anchor="ctr"/>
+          <a:lstStyle/>
+          <a:p>
+            <a:pPr algn="ctr"/>
+            <a:endParaRPr lang="zh-CN" altLang="en-US" sz="1902"/>
+          </a:p>
+        </p:txBody>
+      </p:sp>
+      <p:sp>
+        <p:nvSpPr>
+          <p:cNvPr id="21" name="矩形 20">
+            <a:extLst>
+              <a:ext uri="{FF2B5EF4-FFF2-40B4-BE49-F238E27FC236}">
+                <a16:creationId xmlns:a16="http://schemas.microsoft.com/office/drawing/2014/main" id="{70C2A867-8313-4773-AD3A-B6113F58C1EE}"/>
+              </a:ext>
+            </a:extLst>
+          </p:cNvPr>
+          <p:cNvSpPr/>
+          <p:nvPr/>
+        </p:nvSpPr>
+        <p:spPr>
+          <a:xfrm>
+            <a:off x="3569275" y="556736"/>
+            <a:ext cx="4846539" cy="2963908"/>
+          </a:xfrm>
+          <a:prstGeom prst="rect">
+            <a:avLst/>
+          </a:prstGeom>
+          <a:solidFill>
+            <a:srgbClr val="DAE3F3"/>
+          </a:solidFill>
+          <a:ln>
+            <a:noFill/>
+          </a:ln>
+        </p:spPr>
+        <p:style>
+          <a:lnRef idx="2">
+            <a:schemeClr val="accent1">
+              <a:shade val="50000"/>
+            </a:schemeClr>
+          </a:lnRef>
+          <a:fillRef idx="1">
+            <a:schemeClr val="accent1"/>
+          </a:fillRef>
+          <a:effectRef idx="0">
+            <a:schemeClr val="accent1"/>
+          </a:effectRef>
+          <a:fontRef idx="minor">
+            <a:schemeClr val="lt1"/>
+          </a:fontRef>
+        </p:style>
+        <p:txBody>
+          <a:bodyPr rtlCol="0" anchor="ctr"/>
+          <a:lstStyle/>
+          <a:p>
+            <a:pPr algn="ctr"/>
+            <a:endParaRPr lang="zh-CN" altLang="en-US"/>
+          </a:p>
+        </p:txBody>
+      </p:sp>
+      <mc:AlternateContent xmlns:mc="http://schemas.openxmlformats.org/markup-compatibility/2006" xmlns:a14="http://schemas.microsoft.com/office/drawing/2010/main">
+        <mc:Choice Requires="a14">
+          <p:sp>
+            <p:nvSpPr>
+              <p:cNvPr id="22" name="矩形 21">
+                <a:extLst>
+                  <a:ext uri="{FF2B5EF4-FFF2-40B4-BE49-F238E27FC236}">
+                    <a16:creationId xmlns:a16="http://schemas.microsoft.com/office/drawing/2014/main" id="{D4850514-D0F4-4429-9C9F-ACACAC1C8922}"/>
+                  </a:ext>
+                </a:extLst>
+              </p:cNvPr>
+              <p:cNvSpPr/>
+              <p:nvPr/>
+            </p:nvSpPr>
+            <p:spPr>
+              <a:xfrm>
+                <a:off x="4419641" y="1149973"/>
+                <a:ext cx="3034495" cy="888206"/>
+              </a:xfrm>
+              <a:prstGeom prst="rect">
+                <a:avLst/>
+              </a:prstGeom>
+              <a:solidFill>
+                <a:srgbClr val="DAE3F3"/>
+              </a:solidFill>
+            </p:spPr>
+            <p:style>
+              <a:lnRef idx="2">
+                <a:schemeClr val="accent1">
+                  <a:shade val="50000"/>
+                </a:schemeClr>
+              </a:lnRef>
+              <a:fillRef idx="1">
+                <a:schemeClr val="accent1"/>
+              </a:fillRef>
+              <a:effectRef idx="0">
+                <a:schemeClr val="accent1"/>
+              </a:effectRef>
+              <a:fontRef idx="minor">
+                <a:schemeClr val="lt1"/>
+              </a:fontRef>
+            </p:style>
+            <p:txBody>
+              <a:bodyPr rtlCol="0" anchor="ctr"/>
+              <a:lstStyle/>
+              <a:p>
+                <a:pPr/>
+                <a14:m>
+                  <m:oMathPara xmlns:m="http://schemas.openxmlformats.org/officeDocument/2006/math">
+                    <m:oMathParaPr>
+                      <m:jc m:val="centerGroup"/>
+                    </m:oMathParaPr>
+                    <m:oMath xmlns:m="http://schemas.openxmlformats.org/officeDocument/2006/math">
+                      <m:sSub>
+                        <m:sSubPr>
+                          <m:ctrlPr>
+                            <a:rPr lang="en-US" altLang="zh-CN" sz="1800" i="1" smtClean="0">
+                              <a:solidFill>
+                                <a:schemeClr val="tx1"/>
+                              </a:solidFill>
+                              <a:latin typeface="Cambria Math" panose="02040503050406030204" pitchFamily="18" charset="0"/>
+                            </a:rPr>
+                          </m:ctrlPr>
+                        </m:sSubPr>
+                        <m:e>
+                          <m:r>
+                            <a:rPr lang="en-US" altLang="zh-CN" sz="1800" i="1">
+                              <a:solidFill>
+                                <a:schemeClr val="tx1"/>
+                              </a:solidFill>
+                              <a:latin typeface="Cambria Math" panose="02040503050406030204" pitchFamily="18" charset="0"/>
+                            </a:rPr>
+                            <m:t>𝑐</m:t>
+                          </m:r>
+                        </m:e>
+                        <m:sub>
+                          <m:r>
+                            <a:rPr lang="en-US" altLang="zh-CN" sz="1800" i="1">
+                              <a:solidFill>
+                                <a:schemeClr val="tx1"/>
+                              </a:solidFill>
+                              <a:latin typeface="Cambria Math" panose="02040503050406030204" pitchFamily="18" charset="0"/>
+                            </a:rPr>
+                            <m:t>𝑡</m:t>
+                          </m:r>
+                        </m:sub>
+                      </m:sSub>
+                      <m:r>
+                        <a:rPr lang="en-US" altLang="zh-CN" sz="1800" i="1">
+                          <a:solidFill>
+                            <a:schemeClr val="tx1"/>
+                          </a:solidFill>
+                          <a:latin typeface="Cambria Math" panose="02040503050406030204" pitchFamily="18" charset="0"/>
+                          <a:ea typeface="Cambria Math" panose="02040503050406030204" pitchFamily="18" charset="0"/>
+                        </a:rPr>
+                        <m:t>←</m:t>
+                      </m:r>
+                      <m:r>
+                        <a:rPr lang="en-US" altLang="zh-CN" sz="1800" i="1">
+                          <a:solidFill>
+                            <a:schemeClr val="tx1"/>
+                          </a:solidFill>
+                          <a:latin typeface="Cambria Math" panose="02040503050406030204" pitchFamily="18" charset="0"/>
+                          <a:ea typeface="Cambria Math" panose="02040503050406030204" pitchFamily="18" charset="0"/>
+                        </a:rPr>
+                        <m:t>𝐸𝑀𝐴</m:t>
+                      </m:r>
+                      <m:d>
+                        <m:dPr>
+                          <m:ctrlPr>
+                            <a:rPr lang="en-US" altLang="zh-CN" sz="1800" i="1">
+                              <a:solidFill>
+                                <a:schemeClr val="tx1"/>
+                              </a:solidFill>
+                              <a:latin typeface="Cambria Math" panose="02040503050406030204" pitchFamily="18" charset="0"/>
+                              <a:ea typeface="Cambria Math" panose="02040503050406030204" pitchFamily="18" charset="0"/>
+                            </a:rPr>
+                          </m:ctrlPr>
+                        </m:dPr>
+                        <m:e>
+                          <m:sSub>
+                            <m:sSubPr>
+                              <m:ctrlPr>
+                                <a:rPr lang="en-US" altLang="zh-CN" sz="1800" i="1">
+                                  <a:solidFill>
+                                    <a:schemeClr val="tx1"/>
+                                  </a:solidFill>
+                                  <a:latin typeface="Cambria Math" panose="02040503050406030204" pitchFamily="18" charset="0"/>
+                                  <a:ea typeface="Cambria Math" panose="02040503050406030204" pitchFamily="18" charset="0"/>
+                                </a:rPr>
+                              </m:ctrlPr>
+                            </m:sSubPr>
+                            <m:e>
+                              <m:r>
+                                <a:rPr lang="en-US" altLang="zh-CN" sz="1800" i="1">
+                                  <a:solidFill>
+                                    <a:schemeClr val="tx1"/>
+                                  </a:solidFill>
+                                  <a:latin typeface="Cambria Math" panose="02040503050406030204" pitchFamily="18" charset="0"/>
+                                  <a:ea typeface="Cambria Math" panose="02040503050406030204" pitchFamily="18" charset="0"/>
+                                </a:rPr>
+                                <m:t>𝑐</m:t>
+                              </m:r>
+                            </m:e>
+                            <m:sub>
+                              <m:r>
+                                <a:rPr lang="en-US" altLang="zh-CN" sz="1800" i="1">
+                                  <a:solidFill>
+                                    <a:schemeClr val="tx1"/>
+                                  </a:solidFill>
+                                  <a:latin typeface="Cambria Math" panose="02040503050406030204" pitchFamily="18" charset="0"/>
+                                  <a:ea typeface="Cambria Math" panose="02040503050406030204" pitchFamily="18" charset="0"/>
+                                </a:rPr>
+                                <m:t>𝑡</m:t>
+                              </m:r>
+                              <m:r>
+                                <a:rPr lang="en-US" altLang="zh-CN" sz="1800" i="1">
+                                  <a:solidFill>
+                                    <a:schemeClr val="tx1"/>
+                                  </a:solidFill>
+                                  <a:latin typeface="Cambria Math" panose="02040503050406030204" pitchFamily="18" charset="0"/>
+                                  <a:ea typeface="Cambria Math" panose="02040503050406030204" pitchFamily="18" charset="0"/>
+                                </a:rPr>
+                                <m:t>−1</m:t>
+                              </m:r>
+                            </m:sub>
+                          </m:sSub>
+                          <m:r>
+                            <a:rPr lang="en-US" altLang="zh-CN" sz="1800" i="1">
+                              <a:solidFill>
+                                <a:schemeClr val="tx1"/>
+                              </a:solidFill>
+                              <a:latin typeface="Cambria Math" panose="02040503050406030204" pitchFamily="18" charset="0"/>
+                              <a:ea typeface="Cambria Math" panose="02040503050406030204" pitchFamily="18" charset="0"/>
+                            </a:rPr>
+                            <m:t>,</m:t>
+                          </m:r>
+                          <m:sSub>
+                            <m:sSubPr>
+                              <m:ctrlPr>
+                                <a:rPr lang="en-US" altLang="zh-CN" sz="1800" i="1">
+                                  <a:solidFill>
+                                    <a:schemeClr val="tx1"/>
+                                  </a:solidFill>
+                                  <a:latin typeface="Cambria Math" panose="02040503050406030204" pitchFamily="18" charset="0"/>
+                                  <a:ea typeface="Cambria Math" panose="02040503050406030204" pitchFamily="18" charset="0"/>
+                                </a:rPr>
+                              </m:ctrlPr>
+                            </m:sSubPr>
+                            <m:e>
+                              <m:acc>
+                                <m:accPr>
+                                  <m:chr m:val="̅"/>
+                                  <m:ctrlPr>
+                                    <a:rPr lang="en-US" altLang="zh-CN" sz="1800" i="1">
+                                      <a:solidFill>
+                                        <a:schemeClr val="tx1"/>
+                                      </a:solidFill>
+                                      <a:latin typeface="Cambria Math" panose="02040503050406030204" pitchFamily="18" charset="0"/>
+                                      <a:ea typeface="Cambria Math" panose="02040503050406030204" pitchFamily="18" charset="0"/>
+                                    </a:rPr>
+                                  </m:ctrlPr>
+                                </m:accPr>
+                                <m:e>
+                                  <m:r>
+                                    <a:rPr lang="en-US" altLang="zh-CN" sz="1800" i="1">
+                                      <a:solidFill>
+                                        <a:schemeClr val="tx1"/>
+                                      </a:solidFill>
+                                      <a:latin typeface="Cambria Math" panose="02040503050406030204" pitchFamily="18" charset="0"/>
+                                      <a:ea typeface="Cambria Math" panose="02040503050406030204" pitchFamily="18" charset="0"/>
+                                    </a:rPr>
+                                    <m:t>𝑧</m:t>
+                                  </m:r>
+                                </m:e>
+                              </m:acc>
+                            </m:e>
+                            <m:sub>
+                              <m:r>
+                                <a:rPr lang="en-US" altLang="zh-CN" sz="1800" i="1">
+                                  <a:solidFill>
+                                    <a:schemeClr val="tx1"/>
+                                  </a:solidFill>
+                                  <a:latin typeface="Cambria Math" panose="02040503050406030204" pitchFamily="18" charset="0"/>
+                                  <a:ea typeface="Cambria Math" panose="02040503050406030204" pitchFamily="18" charset="0"/>
+                                </a:rPr>
+                                <m:t>𝑤𝑒𝑖𝑔h𝑡𝑒𝑑</m:t>
+                              </m:r>
+                            </m:sub>
+                          </m:sSub>
+                        </m:e>
+                      </m:d>
+                      <m:r>
+                        <a:rPr lang="en-US" altLang="zh-CN" sz="1800">
+                          <a:solidFill>
+                            <a:schemeClr val="tx1"/>
+                          </a:solidFill>
+                          <a:latin typeface="Cambria Math" panose="02040503050406030204" pitchFamily="18" charset="0"/>
+                          <a:ea typeface="Cambria Math" panose="02040503050406030204" pitchFamily="18" charset="0"/>
+                        </a:rPr>
+                        <m:t>=</m:t>
+                      </m:r>
+                      <m:d>
+                        <m:dPr>
+                          <m:ctrlPr>
+                            <a:rPr lang="en-US" altLang="zh-CN" sz="1800" i="1">
+                              <a:solidFill>
+                                <a:schemeClr val="tx1"/>
+                              </a:solidFill>
+                              <a:latin typeface="Cambria Math" panose="02040503050406030204" pitchFamily="18" charset="0"/>
+                              <a:ea typeface="Cambria Math" panose="02040503050406030204" pitchFamily="18" charset="0"/>
+                            </a:rPr>
+                          </m:ctrlPr>
+                        </m:dPr>
+                        <m:e>
+                          <m:r>
+                            <a:rPr lang="en-US" altLang="zh-CN" sz="1800">
+                              <a:solidFill>
+                                <a:schemeClr val="tx1"/>
+                              </a:solidFill>
+                              <a:latin typeface="Cambria Math" panose="02040503050406030204" pitchFamily="18" charset="0"/>
+                              <a:ea typeface="Cambria Math" panose="02040503050406030204" pitchFamily="18" charset="0"/>
+                            </a:rPr>
+                            <m:t>1−</m:t>
+                          </m:r>
+                          <m:r>
+                            <m:rPr>
+                              <m:sty m:val="p"/>
+                            </m:rPr>
+                            <a:rPr lang="el-GR" altLang="zh-CN" sz="1800" i="1">
+                              <a:solidFill>
+                                <a:schemeClr val="tx1"/>
+                              </a:solidFill>
+                              <a:latin typeface="Cambria Math" panose="02040503050406030204" pitchFamily="18" charset="0"/>
+                              <a:ea typeface="Cambria Math" panose="02040503050406030204" pitchFamily="18" charset="0"/>
+                            </a:rPr>
+                            <m:t>α</m:t>
+                          </m:r>
+                        </m:e>
+                      </m:d>
+                      <m:sSub>
+                        <m:sSubPr>
+                          <m:ctrlPr>
+                            <a:rPr lang="en-US" altLang="zh-CN" sz="1800" i="1">
+                              <a:solidFill>
+                                <a:schemeClr val="tx1"/>
+                              </a:solidFill>
+                              <a:latin typeface="Cambria Math" panose="02040503050406030204" pitchFamily="18" charset="0"/>
+                              <a:ea typeface="Cambria Math" panose="02040503050406030204" pitchFamily="18" charset="0"/>
+                            </a:rPr>
+                          </m:ctrlPr>
+                        </m:sSubPr>
+                        <m:e>
+                          <m:r>
+                            <a:rPr lang="en-US" altLang="zh-CN" sz="1800" i="1">
+                              <a:solidFill>
+                                <a:schemeClr val="tx1"/>
+                              </a:solidFill>
+                              <a:latin typeface="Cambria Math" panose="02040503050406030204" pitchFamily="18" charset="0"/>
+                              <a:ea typeface="Cambria Math" panose="02040503050406030204" pitchFamily="18" charset="0"/>
+                            </a:rPr>
+                            <m:t>𝑐</m:t>
+                          </m:r>
+                        </m:e>
+                        <m:sub>
+                          <m:r>
+                            <a:rPr lang="en-US" altLang="zh-CN" sz="1800" i="1">
+                              <a:solidFill>
+                                <a:schemeClr val="tx1"/>
+                              </a:solidFill>
+                              <a:latin typeface="Cambria Math" panose="02040503050406030204" pitchFamily="18" charset="0"/>
+                              <a:ea typeface="Cambria Math" panose="02040503050406030204" pitchFamily="18" charset="0"/>
+                            </a:rPr>
+                            <m:t>𝑡</m:t>
+                          </m:r>
+                          <m:r>
+                            <a:rPr lang="en-US" altLang="zh-CN" sz="1800" i="1">
+                              <a:solidFill>
+                                <a:schemeClr val="tx1"/>
+                              </a:solidFill>
+                              <a:latin typeface="Cambria Math" panose="02040503050406030204" pitchFamily="18" charset="0"/>
+                              <a:ea typeface="Cambria Math" panose="02040503050406030204" pitchFamily="18" charset="0"/>
+                            </a:rPr>
+                            <m:t>−1</m:t>
+                          </m:r>
+                        </m:sub>
+                      </m:sSub>
+                      <m:r>
+                        <a:rPr lang="en-US" altLang="zh-CN" sz="1800" i="1">
+                          <a:solidFill>
+                            <a:schemeClr val="tx1"/>
+                          </a:solidFill>
+                          <a:latin typeface="Cambria Math" panose="02040503050406030204" pitchFamily="18" charset="0"/>
+                          <a:ea typeface="Cambria Math" panose="02040503050406030204" pitchFamily="18" charset="0"/>
+                        </a:rPr>
+                        <m:t>+</m:t>
+                      </m:r>
+                      <m:r>
+                        <a:rPr lang="zh-CN" altLang="en-US" sz="1800" i="1">
+                          <a:solidFill>
+                            <a:schemeClr val="tx1"/>
+                          </a:solidFill>
+                          <a:latin typeface="Cambria Math" panose="02040503050406030204" pitchFamily="18" charset="0"/>
+                          <a:ea typeface="Cambria Math" panose="02040503050406030204" pitchFamily="18" charset="0"/>
+                        </a:rPr>
+                        <m:t>𝛼</m:t>
+                      </m:r>
+                      <m:r>
+                        <a:rPr lang="zh-CN" altLang="en-US" sz="1800" i="1">
+                          <a:solidFill>
+                            <a:schemeClr val="tx1"/>
+                          </a:solidFill>
+                          <a:latin typeface="Cambria Math" panose="02040503050406030204" pitchFamily="18" charset="0"/>
+                          <a:ea typeface="Cambria Math" panose="02040503050406030204" pitchFamily="18" charset="0"/>
+                        </a:rPr>
+                        <m:t>∙∆</m:t>
+                      </m:r>
+                      <m:sSub>
+                        <m:sSubPr>
+                          <m:ctrlPr>
+                            <a:rPr lang="en-US" altLang="zh-CN" sz="1800" i="1">
+                              <a:solidFill>
+                                <a:schemeClr val="tx1"/>
+                              </a:solidFill>
+                              <a:latin typeface="Cambria Math" panose="02040503050406030204" pitchFamily="18" charset="0"/>
+                              <a:ea typeface="Cambria Math" panose="02040503050406030204" pitchFamily="18" charset="0"/>
+                            </a:rPr>
+                          </m:ctrlPr>
+                        </m:sSubPr>
+                        <m:e>
+                          <m:r>
+                            <a:rPr lang="en-US" altLang="zh-CN" sz="1800" i="1">
+                              <a:solidFill>
+                                <a:schemeClr val="tx1"/>
+                              </a:solidFill>
+                              <a:latin typeface="Cambria Math" panose="02040503050406030204" pitchFamily="18" charset="0"/>
+                              <a:ea typeface="Cambria Math" panose="02040503050406030204" pitchFamily="18" charset="0"/>
+                            </a:rPr>
+                            <m:t>𝑐</m:t>
+                          </m:r>
+                        </m:e>
+                        <m:sub>
+                          <m:r>
+                            <a:rPr lang="en-US" altLang="zh-CN" sz="1800" i="1">
+                              <a:solidFill>
+                                <a:schemeClr val="tx1"/>
+                              </a:solidFill>
+                              <a:latin typeface="Cambria Math" panose="02040503050406030204" pitchFamily="18" charset="0"/>
+                              <a:ea typeface="Cambria Math" panose="02040503050406030204" pitchFamily="18" charset="0"/>
+                            </a:rPr>
+                            <m:t>𝑏𝑎𝑡𝑐h</m:t>
+                          </m:r>
+                        </m:sub>
+                      </m:sSub>
+                    </m:oMath>
+                  </m:oMathPara>
+                </a14:m>
+                <a:endParaRPr lang="en-US" altLang="zh-CN" sz="1800" dirty="0">
+                  <a:solidFill>
+                    <a:schemeClr val="tx1"/>
+                  </a:solidFill>
+                </a:endParaRPr>
+              </a:p>
+            </p:txBody>
+          </p:sp>
+        </mc:Choice>
+        <mc:Fallback xmlns="">
+          <p:sp>
+            <p:nvSpPr>
+              <p:cNvPr id="22" name="矩形 21">
+                <a:extLst>
+                  <a:ext uri="{FF2B5EF4-FFF2-40B4-BE49-F238E27FC236}">
+                    <a16:creationId xmlns:a16="http://schemas.microsoft.com/office/drawing/2014/main" id="{D4850514-D0F4-4429-9C9F-ACACAC1C8922}"/>
+                  </a:ext>
+                </a:extLst>
+              </p:cNvPr>
+              <p:cNvSpPr>
+                <a:spLocks noRot="1" noChangeAspect="1" noMove="1" noResize="1" noEditPoints="1" noAdjustHandles="1" noChangeArrowheads="1" noChangeShapeType="1" noTextEdit="1"/>
+              </p:cNvSpPr>
+              <p:nvPr/>
+            </p:nvSpPr>
+            <p:spPr>
+              <a:xfrm>
+                <a:off x="4419641" y="1149973"/>
+                <a:ext cx="3034495" cy="888206"/>
+              </a:xfrm>
+              <a:prstGeom prst="rect">
+                <a:avLst/>
+              </a:prstGeom>
+              <a:blipFill>
+                <a:blip r:embed="rId101"/>
+                <a:stretch>
+                  <a:fillRect/>
+                </a:stretch>
+              </a:blipFill>
+            </p:spPr>
+            <p:txBody>
+              <a:bodyPr/>
+              <a:lstStyle/>
+              <a:p>
+                <a:r>
+                  <a:rPr lang="zh-CN" altLang="en-US">
+                    <a:noFill/>
+                  </a:rPr>
+                  <a:t> </a:t>
+                </a:r>
+              </a:p>
+            </p:txBody>
+          </p:sp>
+        </mc:Fallback>
+      </mc:AlternateContent>
+      <p:sp>
+        <p:nvSpPr>
+          <p:cNvPr id="137" name="文本框 136">
+            <a:extLst>
+              <a:ext uri="{FF2B5EF4-FFF2-40B4-BE49-F238E27FC236}">
+                <a16:creationId xmlns:a16="http://schemas.microsoft.com/office/drawing/2014/main" id="{D8457659-5B66-4789-B3D2-5CFE6D9F64B1}"/>
               </a:ext>
             </a:extLst>
           </p:cNvPr>
@@ -11857,8 +12350,8 @@
         </p:nvSpPr>
         <p:spPr>
           <a:xfrm>
-            <a:off x="10178083" y="4652342"/>
-            <a:ext cx="824308" cy="287451"/>
+            <a:off x="5191208" y="822858"/>
+            <a:ext cx="1723549" cy="338554"/>
           </a:xfrm>
           <a:prstGeom prst="rect">
             <a:avLst/>
@@ -11866,22 +12359,326 @@
           <a:noFill/>
         </p:spPr>
         <p:txBody>
-          <a:bodyPr wrap="square" rtlCol="0">
+          <a:bodyPr wrap="none" rtlCol="0">
             <a:spAutoFit/>
           </a:bodyPr>
           <a:lstStyle/>
           <a:p>
             <a:r>
-              <a:rPr lang="en-US" altLang="zh-CN" sz="1268" dirty="0">
+              <a:rPr lang="en-US" altLang="zh-CN" sz="1600" dirty="0">
                 <a:latin typeface="宋体" panose="02010600030101010101" pitchFamily="2" charset="-122"/>
                 <a:ea typeface="宋体" panose="02010600030101010101" pitchFamily="2" charset="-122"/>
               </a:rPr>
-              <a:t>(d)Loss</a:t>
+              <a:t>EMA</a:t>
             </a:r>
-            <a:endParaRPr lang="zh-CN" altLang="en-US" sz="1268" dirty="0">
-              <a:latin typeface="宋体" panose="02010600030101010101" pitchFamily="2" charset="-122"/>
-              <a:ea typeface="宋体" panose="02010600030101010101" pitchFamily="2" charset="-122"/>
-            </a:endParaRPr>
+            <a:r>
+              <a:rPr lang="zh-CN" altLang="en-US" sz="1600" dirty="0">
+                <a:latin typeface="宋体" panose="02010600030101010101" pitchFamily="2" charset="-122"/>
+                <a:ea typeface="宋体" panose="02010600030101010101" pitchFamily="2" charset="-122"/>
+              </a:rPr>
+              <a:t>特征中心更新</a:t>
+            </a:r>
+          </a:p>
+        </p:txBody>
+      </p:sp>
+      <mc:AlternateContent xmlns:mc="http://schemas.openxmlformats.org/markup-compatibility/2006" xmlns:a14="http://schemas.microsoft.com/office/drawing/2010/main">
+        <mc:Choice Requires="a14">
+          <p:sp>
+            <p:nvSpPr>
+              <p:cNvPr id="141" name="矩形 140">
+                <a:extLst>
+                  <a:ext uri="{FF2B5EF4-FFF2-40B4-BE49-F238E27FC236}">
+                    <a16:creationId xmlns:a16="http://schemas.microsoft.com/office/drawing/2014/main" id="{4B81D338-C994-4E3F-B688-C14B39AD199C}"/>
+                  </a:ext>
+                </a:extLst>
+              </p:cNvPr>
+              <p:cNvSpPr/>
+              <p:nvPr/>
+            </p:nvSpPr>
+            <p:spPr>
+              <a:xfrm>
+                <a:off x="4890475" y="2643243"/>
+                <a:ext cx="1983688" cy="448511"/>
+              </a:xfrm>
+              <a:prstGeom prst="rect">
+                <a:avLst/>
+              </a:prstGeom>
+              <a:solidFill>
+                <a:srgbClr val="DAE3F3"/>
+              </a:solidFill>
+            </p:spPr>
+            <p:style>
+              <a:lnRef idx="2">
+                <a:schemeClr val="accent1">
+                  <a:shade val="50000"/>
+                </a:schemeClr>
+              </a:lnRef>
+              <a:fillRef idx="1">
+                <a:schemeClr val="accent1"/>
+              </a:fillRef>
+              <a:effectRef idx="0">
+                <a:schemeClr val="accent1"/>
+              </a:effectRef>
+              <a:fontRef idx="minor">
+                <a:schemeClr val="lt1"/>
+              </a:fontRef>
+            </p:style>
+            <p:txBody>
+              <a:bodyPr rtlCol="0" anchor="ctr"/>
+              <a:lstStyle/>
+              <a:p>
+                <a:pPr/>
+                <a14:m>
+                  <m:oMathPara xmlns:m="http://schemas.openxmlformats.org/officeDocument/2006/math">
+                    <m:oMathParaPr>
+                      <m:jc m:val="centerGroup"/>
+                    </m:oMathParaPr>
+                    <m:oMath xmlns:m="http://schemas.openxmlformats.org/officeDocument/2006/math">
+                      <m:sSub>
+                        <m:sSubPr>
+                          <m:ctrlPr>
+                            <a:rPr lang="en-US" altLang="zh-CN" i="1">
+                              <a:solidFill>
+                                <a:schemeClr val="tx1"/>
+                              </a:solidFill>
+                              <a:latin typeface="Cambria Math" panose="02040503050406030204" pitchFamily="18" charset="0"/>
+                              <a:ea typeface="Cambria Math" panose="02040503050406030204" pitchFamily="18" charset="0"/>
+                            </a:rPr>
+                          </m:ctrlPr>
+                        </m:sSubPr>
+                        <m:e>
+                          <m:r>
+                            <a:rPr lang="en-US" altLang="zh-CN" i="1">
+                              <a:solidFill>
+                                <a:schemeClr val="tx1"/>
+                              </a:solidFill>
+                              <a:latin typeface="Cambria Math" panose="02040503050406030204" pitchFamily="18" charset="0"/>
+                              <a:ea typeface="Cambria Math" panose="02040503050406030204" pitchFamily="18" charset="0"/>
+                            </a:rPr>
+                            <m:t>𝑑</m:t>
+                          </m:r>
+                        </m:e>
+                        <m:sub>
+                          <m:r>
+                            <a:rPr lang="en-US" altLang="zh-CN" i="1">
+                              <a:solidFill>
+                                <a:schemeClr val="tx1"/>
+                              </a:solidFill>
+                              <a:latin typeface="Cambria Math" panose="02040503050406030204" pitchFamily="18" charset="0"/>
+                              <a:ea typeface="Cambria Math" panose="02040503050406030204" pitchFamily="18" charset="0"/>
+                            </a:rPr>
+                            <m:t>𝑖</m:t>
+                          </m:r>
+                        </m:sub>
+                      </m:sSub>
+                      <m:r>
+                        <a:rPr lang="en-US" altLang="zh-CN" i="1">
+                          <a:solidFill>
+                            <a:schemeClr val="tx1"/>
+                          </a:solidFill>
+                          <a:latin typeface="Cambria Math" panose="02040503050406030204" pitchFamily="18" charset="0"/>
+                          <a:ea typeface="Cambria Math" panose="02040503050406030204" pitchFamily="18" charset="0"/>
+                        </a:rPr>
+                        <m:t>=</m:t>
+                      </m:r>
+                      <m:sSup>
+                        <m:sSupPr>
+                          <m:ctrlPr>
+                            <a:rPr lang="en-US" altLang="zh-CN" i="1">
+                              <a:solidFill>
+                                <a:schemeClr val="tx1"/>
+                              </a:solidFill>
+                              <a:latin typeface="Cambria Math" panose="02040503050406030204" pitchFamily="18" charset="0"/>
+                              <a:ea typeface="Cambria Math" panose="02040503050406030204" pitchFamily="18" charset="0"/>
+                            </a:rPr>
+                          </m:ctrlPr>
+                        </m:sSupPr>
+                        <m:e>
+                          <m:r>
+                            <a:rPr lang="en-US" altLang="zh-CN" i="1">
+                              <a:solidFill>
+                                <a:schemeClr val="tx1"/>
+                              </a:solidFill>
+                              <a:latin typeface="Cambria Math" panose="02040503050406030204" pitchFamily="18" charset="0"/>
+                              <a:ea typeface="Cambria Math" panose="02040503050406030204" pitchFamily="18" charset="0"/>
+                            </a:rPr>
+                            <m:t>||</m:t>
+                          </m:r>
+                          <m:sSub>
+                            <m:sSubPr>
+                              <m:ctrlPr>
+                                <a:rPr lang="en-US" altLang="zh-CN" i="1">
+                                  <a:solidFill>
+                                    <a:schemeClr val="tx1"/>
+                                  </a:solidFill>
+                                  <a:latin typeface="Cambria Math" panose="02040503050406030204" pitchFamily="18" charset="0"/>
+                                  <a:ea typeface="Cambria Math" panose="02040503050406030204" pitchFamily="18" charset="0"/>
+                                </a:rPr>
+                              </m:ctrlPr>
+                            </m:sSubPr>
+                            <m:e>
+                              <m:r>
+                                <a:rPr lang="en-US" altLang="zh-CN" i="1">
+                                  <a:solidFill>
+                                    <a:schemeClr val="tx1"/>
+                                  </a:solidFill>
+                                  <a:latin typeface="Cambria Math" panose="02040503050406030204" pitchFamily="18" charset="0"/>
+                                  <a:ea typeface="Cambria Math" panose="02040503050406030204" pitchFamily="18" charset="0"/>
+                                </a:rPr>
+                                <m:t>𝑧</m:t>
+                              </m:r>
+                            </m:e>
+                            <m:sub>
+                              <m:r>
+                                <a:rPr lang="en-US" altLang="zh-CN" i="1">
+                                  <a:solidFill>
+                                    <a:schemeClr val="tx1"/>
+                                  </a:solidFill>
+                                  <a:latin typeface="Cambria Math" panose="02040503050406030204" pitchFamily="18" charset="0"/>
+                                  <a:ea typeface="Cambria Math" panose="02040503050406030204" pitchFamily="18" charset="0"/>
+                                </a:rPr>
+                                <m:t>𝑖</m:t>
+                              </m:r>
+                            </m:sub>
+                          </m:sSub>
+                          <m:r>
+                            <a:rPr lang="en-US" altLang="zh-CN" i="1">
+                              <a:solidFill>
+                                <a:schemeClr val="tx1"/>
+                              </a:solidFill>
+                              <a:latin typeface="Cambria Math" panose="02040503050406030204" pitchFamily="18" charset="0"/>
+                              <a:ea typeface="Cambria Math" panose="02040503050406030204" pitchFamily="18" charset="0"/>
+                            </a:rPr>
+                            <m:t>−</m:t>
+                          </m:r>
+                          <m:r>
+                            <a:rPr lang="en-US" altLang="zh-CN" i="1">
+                              <a:solidFill>
+                                <a:schemeClr val="tx1"/>
+                              </a:solidFill>
+                              <a:latin typeface="Cambria Math" panose="02040503050406030204" pitchFamily="18" charset="0"/>
+                              <a:ea typeface="Cambria Math" panose="02040503050406030204" pitchFamily="18" charset="0"/>
+                            </a:rPr>
+                            <m:t>𝑐</m:t>
+                          </m:r>
+                          <m:r>
+                            <a:rPr lang="en-US" altLang="zh-CN" i="1">
+                              <a:solidFill>
+                                <a:schemeClr val="tx1"/>
+                              </a:solidFill>
+                              <a:latin typeface="Cambria Math" panose="02040503050406030204" pitchFamily="18" charset="0"/>
+                              <a:ea typeface="Cambria Math" panose="02040503050406030204" pitchFamily="18" charset="0"/>
+                            </a:rPr>
+                            <m:t>||</m:t>
+                          </m:r>
+                        </m:e>
+                        <m:sup>
+                          <m:r>
+                            <a:rPr lang="en-US" altLang="zh-CN" i="1">
+                              <a:solidFill>
+                                <a:schemeClr val="tx1"/>
+                              </a:solidFill>
+                              <a:latin typeface="Cambria Math" panose="02040503050406030204" pitchFamily="18" charset="0"/>
+                              <a:ea typeface="Cambria Math" panose="02040503050406030204" pitchFamily="18" charset="0"/>
+                            </a:rPr>
+                            <m:t>2</m:t>
+                          </m:r>
+                        </m:sup>
+                      </m:sSup>
+                    </m:oMath>
+                  </m:oMathPara>
+                </a14:m>
+                <a:endParaRPr lang="zh-CN" altLang="en-US" i="1" dirty="0">
+                  <a:solidFill>
+                    <a:schemeClr val="tx1"/>
+                  </a:solidFill>
+                  <a:latin typeface="Cambria Math" panose="02040503050406030204" pitchFamily="18" charset="0"/>
+                  <a:ea typeface="Cambria Math" panose="02040503050406030204" pitchFamily="18" charset="0"/>
+                </a:endParaRPr>
+              </a:p>
+            </p:txBody>
+          </p:sp>
+        </mc:Choice>
+        <mc:Fallback xmlns="">
+          <p:sp>
+            <p:nvSpPr>
+              <p:cNvPr id="141" name="矩形 140">
+                <a:extLst>
+                  <a:ext uri="{FF2B5EF4-FFF2-40B4-BE49-F238E27FC236}">
+                    <a16:creationId xmlns:a16="http://schemas.microsoft.com/office/drawing/2014/main" id="{4B81D338-C994-4E3F-B688-C14B39AD199C}"/>
+                  </a:ext>
+                </a:extLst>
+              </p:cNvPr>
+              <p:cNvSpPr>
+                <a:spLocks noRot="1" noChangeAspect="1" noMove="1" noResize="1" noEditPoints="1" noAdjustHandles="1" noChangeArrowheads="1" noChangeShapeType="1" noTextEdit="1"/>
+              </p:cNvSpPr>
+              <p:nvPr/>
+            </p:nvSpPr>
+            <p:spPr>
+              <a:xfrm>
+                <a:off x="4890475" y="2643243"/>
+                <a:ext cx="1983688" cy="448511"/>
+              </a:xfrm>
+              <a:prstGeom prst="rect">
+                <a:avLst/>
+              </a:prstGeom>
+              <a:blipFill>
+                <a:blip r:embed="rId102"/>
+                <a:stretch>
+                  <a:fillRect b="-2667"/>
+                </a:stretch>
+              </a:blipFill>
+            </p:spPr>
+            <p:txBody>
+              <a:bodyPr/>
+              <a:lstStyle/>
+              <a:p>
+                <a:r>
+                  <a:rPr lang="zh-CN" altLang="en-US">
+                    <a:noFill/>
+                  </a:rPr>
+                  <a:t> </a:t>
+                </a:r>
+              </a:p>
+            </p:txBody>
+          </p:sp>
+        </mc:Fallback>
+      </mc:AlternateContent>
+      <p:sp>
+        <p:nvSpPr>
+          <p:cNvPr id="149" name="文本框 148">
+            <a:extLst>
+              <a:ext uri="{FF2B5EF4-FFF2-40B4-BE49-F238E27FC236}">
+                <a16:creationId xmlns:a16="http://schemas.microsoft.com/office/drawing/2014/main" id="{4A3CD1ED-F6C5-4C41-B7CD-2BC7E88C9BD5}"/>
+              </a:ext>
+            </a:extLst>
+          </p:cNvPr>
+          <p:cNvSpPr txBox="1"/>
+          <p:nvPr/>
+        </p:nvSpPr>
+        <p:spPr>
+          <a:xfrm>
+            <a:off x="5347282" y="2281669"/>
+            <a:ext cx="1005403" cy="338554"/>
+          </a:xfrm>
+          <a:prstGeom prst="rect">
+            <a:avLst/>
+          </a:prstGeom>
+          <a:noFill/>
+        </p:spPr>
+        <p:txBody>
+          <a:bodyPr wrap="none" rtlCol="0">
+            <a:spAutoFit/>
+          </a:bodyPr>
+          <a:lstStyle/>
+          <a:p>
+            <a:r>
+              <a:rPr lang="zh-CN" altLang="en-US" sz="1600" dirty="0">
+                <a:latin typeface="宋体" panose="02010600030101010101" pitchFamily="2" charset="-122"/>
+                <a:ea typeface="宋体" panose="02010600030101010101" pitchFamily="2" charset="-122"/>
+              </a:rPr>
+              <a:t>距离度量</a:t>
+            </a:r>
           </a:p>
         </p:txBody>
       </p:sp>
